--- a/03-build/pptx/C4_U3_alumno.pptx
+++ b/03-build/pptx/C4_U3_alumno.pptx
@@ -11665,7 +11665,7 @@
         <p:spPr>
           <a:xfrm>
             <a:off x="7498079" y="1417320"/>
-            <a:ext cx="4206240" cy="3108960"/>
+            <a:ext cx="4206240" cy="2240280"/>
           </a:xfrm>
           <a:prstGeom prst="roundRect">
             <a:avLst>
@@ -11719,8 +11719,8 @@
         </p:nvSpPr>
         <p:spPr>
           <a:xfrm>
-            <a:off x="7726679" y="1600200"/>
-            <a:ext cx="3749039" cy="2834640"/>
+            <a:off x="7726679" y="1572768"/>
+            <a:ext cx="3749039" cy="2011680"/>
           </a:xfrm>
           <a:prstGeom prst="rect">
             <a:avLst/>
@@ -11745,7 +11745,7 @@
               </a:spcAft>
             </a:pPr>
             <a:r>
-              <a:rPr sz="1400" b="1" i="0">
+              <a:rPr sz="1300" b="1" i="0">
                 <a:solidFill>
                   <a:srgbClr val="A8323B"/>
                 </a:solidFill>
@@ -11767,13 +11767,13 @@
               </a:spcAft>
             </a:pPr>
             <a:r>
-              <a:rPr sz="1250" b="0" i="0">
+              <a:rPr sz="1150" b="0" i="0">
                 <a:solidFill>
                   <a:srgbClr val="20242E"/>
                 </a:solidFill>
                 <a:latin typeface="Inter"/>
               </a:rPr>
-              <a:t>¿De dónde eres? · ¿De qué país?</a:t>
+              <a:t>¿De dónde eres? · Soy de + país</a:t>
             </a:r>
           </a:p>
           <a:p>
@@ -11789,13 +11789,13 @@
               </a:spcAft>
             </a:pPr>
             <a:r>
-              <a:rPr sz="1250" b="0" i="0">
+              <a:rPr sz="1150" b="0" i="0">
                 <a:solidFill>
                   <a:srgbClr val="20242E"/>
                 </a:solidFill>
                 <a:latin typeface="Inter"/>
               </a:rPr>
-              <a:t>Soy de + país · Soy de Argelia</a:t>
+              <a:t>argelino ♂ · argelina ♀</a:t>
             </a:r>
           </a:p>
           <a:p>
@@ -11811,13 +11811,13 @@
               </a:spcAft>
             </a:pPr>
             <a:r>
-              <a:rPr sz="1250" b="0" i="0">
+              <a:rPr sz="1150" b="0" i="0">
                 <a:solidFill>
                   <a:srgbClr val="20242E"/>
                 </a:solidFill>
                 <a:latin typeface="Inter"/>
               </a:rPr>
-              <a:t>argelino ♂ · argelina ♀</a:t>
+              <a:t>Hablo español · un poco</a:t>
             </a:r>
           </a:p>
           <a:p>
@@ -11833,34 +11833,12 @@
               </a:spcAft>
             </a:pPr>
             <a:r>
-              <a:rPr sz="1250" b="0" i="0">
+              <a:rPr sz="1150" b="0" i="0">
                 <a:solidFill>
                   <a:srgbClr val="20242E"/>
                 </a:solidFill>
                 <a:latin typeface="Inter"/>
               </a:rPr>
-              <a:t>Hablo español · un poco · bastante bien</a:t>
-            </a:r>
-          </a:p>
-          <a:p>
-            <a:pPr algn="l">
-              <a:lnSpc>
-                <a:spcPct val="106000"/>
-              </a:lnSpc>
-              <a:spcBef>
-                <a:spcPts val="0"/>
-              </a:spcBef>
-              <a:spcAft>
-                <a:spcPts val="200"/>
-              </a:spcAft>
-            </a:pPr>
-            <a:r>
-              <a:rPr sz="1250" b="0" i="0">
-                <a:solidFill>
-                  <a:srgbClr val="20242E"/>
-                </a:solidFill>
-                <a:latin typeface="Inter"/>
-              </a:rPr>
               <a:t>árabe · francés · español · inglés</a:t>
             </a:r>
           </a:p>
@@ -11868,69 +11846,14 @@
       </p:sp>
       <p:sp>
         <p:nvSpPr>
-          <p:cNvPr id="28" name="Rounded Rectangle 27"/>
-          <p:cNvSpPr/>
-          <p:nvPr/>
-        </p:nvSpPr>
-        <p:spPr>
-          <a:xfrm>
-            <a:off x="7498079" y="4663440"/>
-            <a:ext cx="4206240" cy="1234440"/>
-          </a:xfrm>
-          <a:prstGeom prst="roundRect">
-            <a:avLst>
-              <a:gd name="adj" fmla="val 5500"/>
-            </a:avLst>
-          </a:prstGeom>
-          <a:solidFill>
-            <a:srgbClr val="FFFFFF"/>
-          </a:solidFill>
-          <a:ln w="15240">
-            <a:solidFill>
-              <a:srgbClr val="E4E3DE"/>
-            </a:solidFill>
-          </a:ln>
-          <a:effectLst/>
-          <a:effectLst>
-            <a:outerShdw blurRad="90000" dist="38000" dir="5400000" rotWithShape="0">
-              <a:srgbClr val="20242E">
-                <a:alpha val="22000"/>
-              </a:srgbClr>
-            </a:outerShdw>
-          </a:effectLst>
-        </p:spPr>
-        <p:style>
-          <a:lnRef idx="1">
-            <a:schemeClr val="accent1"/>
-          </a:lnRef>
-          <a:fillRef idx="3">
-            <a:schemeClr val="accent1"/>
-          </a:fillRef>
-          <a:effectRef idx="2">
-            <a:schemeClr val="accent1"/>
-          </a:effectRef>
-          <a:fontRef idx="minor">
-            <a:schemeClr val="lt1"/>
-          </a:fontRef>
-        </p:style>
-        <p:txBody>
-          <a:bodyPr rtlCol="0" anchor="ctr"/>
-          <a:lstStyle/>
-          <a:p>
-            <a:pPr algn="ctr"/>
-          </a:p>
-        </p:txBody>
-      </p:sp>
-      <p:sp>
-        <p:nvSpPr>
-          <p:cNvPr id="29" name="TextBox 28"/>
+          <p:cNvPr id="28" name="TextBox 27"/>
           <p:cNvSpPr txBox="1"/>
           <p:nvPr/>
         </p:nvSpPr>
         <p:spPr>
           <a:xfrm>
-            <a:off x="7726679" y="4800600"/>
-            <a:ext cx="3749039" cy="1005840"/>
+            <a:off x="7498079" y="3767328"/>
+            <a:ext cx="4206240" cy="274320"/>
           </a:xfrm>
           <a:prstGeom prst="rect">
             <a:avLst/>
@@ -11955,39 +11878,50 @@
               </a:spcAft>
             </a:pPr>
             <a:r>
-              <a:rPr sz="1200" b="1" i="0">
+              <a:rPr sz="1100" b="1" i="0">
                 <a:solidFill>
                   <a:srgbClr val="A8323B"/>
                 </a:solidFill>
                 <a:latin typeface="Bricolage Grotesque"/>
               </a:rPr>
-              <a:t>🎬 Vídeo online · Episodio 3</a:t>
-            </a:r>
-          </a:p>
-          <a:p>
-            <a:pPr algn="l">
-              <a:lnSpc>
-                <a:spcPct val="106000"/>
-              </a:lnSpc>
-              <a:spcBef>
-                <a:spcPts val="0"/>
-              </a:spcBef>
-              <a:spcAft>
-                <a:spcPts val="200"/>
-              </a:spcAft>
-            </a:pPr>
-            <a:r>
-              <a:rPr sz="1050" b="0" i="0">
-                <a:solidFill>
-                  <a:srgbClr val="6A6E78"/>
-                </a:solidFill>
-                <a:latin typeface="Inter"/>
-              </a:rPr>
-              <a:t>Scan de QR op de cursus of open de digitale hub → tabblad Escucha. Fallback: youtu.be/62GTD0QXbiI</a:t>
-            </a:r>
-          </a:p>
-        </p:txBody>
-      </p:sp>
+              <a:t>🎬 Sitcom · Episodio 3 — klik om af te spelen</a:t>
+            </a:r>
+          </a:p>
+        </p:txBody>
+      </p:sp>
+      <p:pic>
+        <p:nvPicPr>
+          <p:cNvPr id="29" name="Picture 28" descr="video_poster_U3.png">
+            <a:hlinkClick r:id="" action="ppaction://media"/>
+          </p:cNvPr>
+          <p:cNvPicPr>
+            <a:picLocks noChangeAspect="1"/>
+          </p:cNvPicPr>
+          <p:nvPr>
+            <a:videoFile r:link="rId3"/>
+            <p:extLst>
+              <p:ext uri="{DAA4B4D4-6D71-4841-9C94-3DE7FCFB9230}">
+                <p14:media xmlns:p14="http://schemas.microsoft.com/office/powerpoint/2010/main" r:embed="rId4"/>
+              </p:ext>
+            </p:extLst>
+          </p:nvPr>
+        </p:nvPicPr>
+        <p:blipFill>
+          <a:blip r:embed="rId2"/>
+          <a:stretch>
+            <a:fillRect/>
+          </a:stretch>
+        </p:blipFill>
+        <p:spPr>
+          <a:xfrm>
+            <a:off x="7498079" y="4069080"/>
+            <a:ext cx="4206240" cy="2331720"/>
+          </a:xfrm>
+          <a:prstGeom prst="rect">
+            <a:avLst/>
+          </a:prstGeom>
+        </p:spPr>
+      </p:pic>
       <p:sp>
         <p:nvSpPr>
           <p:cNvPr id="30" name="Rectangle 29"/>

--- a/03-build/pptx/C4_U3_alumno.pptx
+++ b/03-build/pptx/C4_U3_alumno.pptx
@@ -18,6 +18,7 @@
     <p:sldId id="266" r:id="rId17"/>
     <p:sldId id="267" r:id="rId18"/>
     <p:sldId id="268" r:id="rId19"/>
+    <p:sldId id="269" r:id="rId20"/>
   </p:sldIdLst>
   <p:sldSz cx="12191695" cy="6858000" type="screen4x3"/>
   <p:notesSz cx="6858000" cy="9144000"/>
@@ -7442,7 +7443,7 @@
         <p:spPr>
           <a:xfrm>
             <a:off x="502920" y="182880"/>
-            <a:ext cx="623620" cy="292608"/>
+            <a:ext cx="875995" cy="292608"/>
           </a:xfrm>
           <a:prstGeom prst="roundRect">
             <a:avLst>
@@ -7483,7 +7484,7 @@
                 </a:solidFill>
                 <a:latin typeface="Inter"/>
               </a:rPr>
-              <a:t>REPASO</a:t>
+              <a:t>FUNCIONES</a:t>
             </a:r>
           </a:p>
         </p:txBody>
@@ -7528,7 +7529,7 @@
                 </a:solidFill>
                 <a:latin typeface="Bricolage Grotesque"/>
               </a:rPr>
-              <a:t>Lo esencial de un vistazo</a:t>
+              <a:t>Mis funciones comunicativas</a:t>
             </a:r>
           </a:p>
         </p:txBody>
@@ -7573,21 +7574,75 @@
                 </a:solidFill>
                 <a:latin typeface="Inter"/>
               </a:rPr>
-              <a:t>Wat je nu kunt — semáforo</a:t>
-            </a:r>
-          </a:p>
-        </p:txBody>
-      </p:sp>
-      <p:sp>
-        <p:nvSpPr>
-          <p:cNvPr id="8" name="Rounded Rectangle 7"/>
+              <a:t>Lo que ya sé hacer — crece cada unidad</a:t>
+            </a:r>
+          </a:p>
+        </p:txBody>
+      </p:sp>
+      <p:sp>
+        <p:nvSpPr>
+          <p:cNvPr id="8" name="TextBox 7"/>
+          <p:cNvSpPr txBox="1"/>
+          <p:nvPr/>
+        </p:nvSpPr>
+        <p:spPr>
+          <a:xfrm>
+            <a:off x="548640" y="1298448"/>
+            <a:ext cx="11155680" cy="320040"/>
+          </a:xfrm>
+          <a:prstGeom prst="rect">
+            <a:avLst/>
+          </a:prstGeom>
+          <a:noFill/>
+        </p:spPr>
+        <p:txBody>
+          <a:bodyPr wrap="square" anchor="t" lIns="38100" rIns="38100" tIns="25400" bIns="25400">
+            <a:spAutoFit/>
+          </a:bodyPr>
+          <a:lstStyle/>
+          <a:p>
+            <a:pPr algn="l">
+              <a:lnSpc>
+                <a:spcPct val="106000"/>
+              </a:lnSpc>
+              <a:spcBef>
+                <a:spcPts val="0"/>
+              </a:spcBef>
+              <a:spcAft>
+                <a:spcPts val="200"/>
+              </a:spcAft>
+            </a:pPr>
+            <a:r>
+              <a:rPr sz="1300" b="1" i="0">
+                <a:solidFill>
+                  <a:srgbClr val="A8323B"/>
+                </a:solidFill>
+                <a:latin typeface="Bricolage Grotesque"/>
+              </a:rPr>
+              <a:t>Mi repertorio: 8 / 8 funciones — </a:t>
+            </a:r>
+            <a:r>
+              <a:rPr sz="1200" b="0" i="0">
+                <a:solidFill>
+                  <a:srgbClr val="6A6E78"/>
+                </a:solidFill>
+                <a:latin typeface="Inter"/>
+              </a:rPr>
+              <a:t>no solo palabras: lo que puedo HACER con el español.</a:t>
+            </a:r>
+          </a:p>
+        </p:txBody>
+      </p:sp>
+      <p:sp>
+        <p:nvSpPr>
+          <p:cNvPr id="9" name="Rounded Rectangle 8"/>
           <p:cNvSpPr/>
           <p:nvPr/>
         </p:nvSpPr>
         <p:spPr>
           <a:xfrm>
-            <a:off x="502920" y="1554480"/>
-            <a:ext cx="6949440" cy="4023360"/>
+            <a:off x="502920" y="1691640"/>
+            <a:ext cx="5394960" cy="1060704"/>
           </a:xfrm>
           <a:prstGeom prst="roundRect">
             <a:avLst>
@@ -7635,14 +7690,14 @@
       </p:sp>
       <p:sp>
         <p:nvSpPr>
-          <p:cNvPr id="9" name="TextBox 8"/>
+          <p:cNvPr id="10" name="TextBox 9"/>
           <p:cNvSpPr txBox="1"/>
           <p:nvPr/>
         </p:nvSpPr>
         <p:spPr>
           <a:xfrm>
-            <a:off x="777240" y="1737360"/>
-            <a:ext cx="6492240" cy="3657600"/>
+            <a:off x="704088" y="1801368"/>
+            <a:ext cx="4992624" cy="365760"/>
           </a:xfrm>
           <a:prstGeom prst="rect">
             <a:avLst/>
@@ -7667,181 +7722,81 @@
               </a:spcAft>
             </a:pPr>
             <a:r>
-              <a:rPr sz="1400" b="1" i="0">
+              <a:rPr sz="1250" b="1" i="0">
+                <a:solidFill>
+                  <a:srgbClr val="20242E"/>
+                </a:solidFill>
+                <a:latin typeface="Bricolage Grotesque"/>
+              </a:rPr>
+              <a:t>Saludar y despedirse</a:t>
+            </a:r>
+            <a:r>
+              <a:rPr sz="900" b="1" i="0">
                 <a:solidFill>
                   <a:srgbClr val="A8323B"/>
                 </a:solidFill>
-                <a:latin typeface="Bricolage Grotesque"/>
-              </a:rPr>
-              <a:t>Zo vraag &amp; zeg je het origen</a:t>
-            </a:r>
-          </a:p>
-          <a:p>
-            <a:pPr algn="l">
-              <a:lnSpc>
-                <a:spcPct val="106000"/>
-              </a:lnSpc>
-              <a:spcBef>
-                <a:spcPts val="0"/>
-              </a:spcBef>
-              <a:spcAft>
-                <a:spcPts val="200"/>
-              </a:spcAft>
-            </a:pPr>
-            <a:r>
-              <a:rPr sz="1400" b="0" i="0">
-                <a:solidFill>
-                  <a:srgbClr val="20242E"/>
-                </a:solidFill>
-                <a:latin typeface="Inter"/>
-              </a:rPr>
-              <a:t>¿De dónde eres? → Soy de + país (Soy de Bélgica)</a:t>
-            </a:r>
-          </a:p>
-          <a:p>
-            <a:pPr algn="l">
-              <a:lnSpc>
-                <a:spcPct val="106000"/>
-              </a:lnSpc>
-              <a:spcBef>
-                <a:spcPts val="0"/>
-              </a:spcBef>
-              <a:spcAft>
-                <a:spcPts val="200"/>
-              </a:spcAft>
-            </a:pPr>
-            <a:r>
-              <a:rPr sz="1300" b="0" i="0">
-                <a:solidFill>
-                  <a:srgbClr val="20242E"/>
-                </a:solidFill>
-                <a:latin typeface="Inter"/>
-              </a:rPr>
-              <a:t>Land = met de · nationaliteit = zónder de (soy belga)</a:t>
-            </a:r>
-          </a:p>
-          <a:p>
-            <a:pPr algn="l">
-              <a:lnSpc>
-                <a:spcPct val="106000"/>
-              </a:lnSpc>
-              <a:spcBef>
-                <a:spcPts val="0"/>
-              </a:spcBef>
-              <a:spcAft>
-                <a:spcPts val="200"/>
-              </a:spcAft>
-            </a:pPr>
-            <a:r>
-              <a:rPr sz="600" b="0" i="0">
-                <a:solidFill>
-                  <a:srgbClr val="20242E"/>
-                </a:solidFill>
                 <a:latin typeface="Inter"/>
               </a:rPr>
               <a:t/>
             </a:r>
           </a:p>
-          <a:p>
-            <a:pPr algn="l">
-              <a:lnSpc>
-                <a:spcPct val="106000"/>
-              </a:lnSpc>
-              <a:spcBef>
-                <a:spcPts val="0"/>
-              </a:spcBef>
-              <a:spcAft>
-                <a:spcPts val="200"/>
-              </a:spcAft>
-            </a:pPr>
-            <a:r>
-              <a:rPr sz="1400" b="1" i="0">
-                <a:solidFill>
-                  <a:srgbClr val="A8323B"/>
-                </a:solidFill>
-                <a:latin typeface="Bricolage Grotesque"/>
-              </a:rPr>
-              <a:t>Nationaliteit &amp; talen</a:t>
-            </a:r>
-          </a:p>
-          <a:p>
-            <a:pPr algn="l">
-              <a:lnSpc>
-                <a:spcPct val="106000"/>
-              </a:lnSpc>
-              <a:spcBef>
-                <a:spcPts val="0"/>
-              </a:spcBef>
-              <a:spcAft>
-                <a:spcPts val="200"/>
-              </a:spcAft>
-            </a:pPr>
-            <a:r>
-              <a:rPr sz="1300" b="0" i="0">
-                <a:solidFill>
-                  <a:srgbClr val="20242E"/>
-                </a:solidFill>
-                <a:latin typeface="Inter"/>
-              </a:rPr>
-              <a:t>mexicano ♂ / mexicana ♀ · met kleine letter</a:t>
-            </a:r>
-          </a:p>
-          <a:p>
-            <a:pPr algn="l">
-              <a:lnSpc>
-                <a:spcPct val="106000"/>
-              </a:lnSpc>
-              <a:spcBef>
-                <a:spcPts val="0"/>
-              </a:spcBef>
-              <a:spcAft>
-                <a:spcPts val="200"/>
-              </a:spcAft>
-            </a:pPr>
-            <a:r>
-              <a:rPr sz="1300" b="0" i="0">
-                <a:solidFill>
-                  <a:srgbClr val="20242E"/>
-                </a:solidFill>
-                <a:latin typeface="Inter"/>
-              </a:rPr>
-              <a:t>Hablo español, neerlandés, francés…</a:t>
-            </a:r>
-          </a:p>
-          <a:p>
-            <a:pPr algn="l">
-              <a:lnSpc>
-                <a:spcPct val="106000"/>
-              </a:lnSpc>
-              <a:spcBef>
-                <a:spcPts val="0"/>
-              </a:spcBef>
-              <a:spcAft>
-                <a:spcPts val="200"/>
-              </a:spcAft>
-            </a:pPr>
-            <a:r>
-              <a:rPr sz="1300" b="0" i="0">
-                <a:solidFill>
-                  <a:srgbClr val="20242E"/>
-                </a:solidFill>
-                <a:latin typeface="Inter"/>
-              </a:rPr>
-              <a:t>belga · marroquí blijven gelijk (♂ = ♀)</a:t>
-            </a:r>
-          </a:p>
-        </p:txBody>
-      </p:sp>
-      <p:sp>
-        <p:nvSpPr>
-          <p:cNvPr id="10" name="Rounded Rectangle 9"/>
+        </p:txBody>
+      </p:sp>
+      <p:sp>
+        <p:nvSpPr>
+          <p:cNvPr id="11" name="TextBox 10"/>
+          <p:cNvSpPr txBox="1"/>
+          <p:nvPr/>
+        </p:nvSpPr>
+        <p:spPr>
+          <a:xfrm>
+            <a:off x="704088" y="2194560"/>
+            <a:ext cx="4992624" cy="502920"/>
+          </a:xfrm>
+          <a:prstGeom prst="rect">
+            <a:avLst/>
+          </a:prstGeom>
+          <a:noFill/>
+        </p:spPr>
+        <p:txBody>
+          <a:bodyPr wrap="square" anchor="t" lIns="38100" rIns="38100" tIns="25400" bIns="25400">
+            <a:spAutoFit/>
+          </a:bodyPr>
+          <a:lstStyle/>
+          <a:p>
+            <a:pPr algn="l">
+              <a:lnSpc>
+                <a:spcPct val="106000"/>
+              </a:lnSpc>
+              <a:spcBef>
+                <a:spcPts val="0"/>
+              </a:spcBef>
+              <a:spcAft>
+                <a:spcPts val="200"/>
+              </a:spcAft>
+            </a:pPr>
+            <a:r>
+              <a:rPr sz="900" b="0" i="0">
+                <a:solidFill>
+                  <a:srgbClr val="6A6E78"/>
+                </a:solidFill>
+                <a:latin typeface="Inter"/>
+              </a:rPr>
+              <a:t>Hola · Adiós · Hasta luego · Buenos días / tardes / noches · ¡Buenas! · Hasta mañana · ¡Nos vemos!</a:t>
+            </a:r>
+          </a:p>
+        </p:txBody>
+      </p:sp>
+      <p:sp>
+        <p:nvSpPr>
+          <p:cNvPr id="12" name="Rounded Rectangle 11"/>
           <p:cNvSpPr/>
           <p:nvPr/>
         </p:nvSpPr>
         <p:spPr>
           <a:xfrm>
-            <a:off x="7680960" y="1554480"/>
-            <a:ext cx="4023360" cy="4023360"/>
+            <a:off x="6263640" y="1691640"/>
+            <a:ext cx="5394960" cy="1060704"/>
           </a:xfrm>
           <a:prstGeom prst="roundRect">
             <a:avLst>
@@ -7889,14 +7844,14 @@
       </p:sp>
       <p:sp>
         <p:nvSpPr>
-          <p:cNvPr id="11" name="TextBox 10"/>
+          <p:cNvPr id="13" name="TextBox 12"/>
           <p:cNvSpPr txBox="1"/>
           <p:nvPr/>
         </p:nvSpPr>
         <p:spPr>
           <a:xfrm>
-            <a:off x="7909560" y="1737360"/>
-            <a:ext cx="3566160" cy="457200"/>
+            <a:off x="6464808" y="1801368"/>
+            <a:ext cx="4992624" cy="365760"/>
           </a:xfrm>
           <a:prstGeom prst="rect">
             <a:avLst/>
@@ -7921,27 +7876,36 @@
               </a:spcAft>
             </a:pPr>
             <a:r>
-              <a:rPr sz="1300" b="1" i="0">
+              <a:rPr sz="1250" b="1" i="0">
+                <a:solidFill>
+                  <a:srgbClr val="20242E"/>
+                </a:solidFill>
+                <a:latin typeface="Bricolage Grotesque"/>
+              </a:rPr>
+              <a:t>Presentarse (decir quién soy)</a:t>
+            </a:r>
+            <a:r>
+              <a:rPr sz="900" b="1" i="0">
                 <a:solidFill>
                   <a:srgbClr val="A8323B"/>
                 </a:solidFill>
-                <a:latin typeface="Bricolage Grotesque"/>
-              </a:rPr>
-              <a:t>Puedo… · Ik kan…</a:t>
-            </a:r>
-          </a:p>
-        </p:txBody>
-      </p:sp>
-      <p:sp>
-        <p:nvSpPr>
-          <p:cNvPr id="12" name="TextBox 11"/>
+                <a:latin typeface="Inter"/>
+              </a:rPr>
+              <a:t>  ▲ nivel+</a:t>
+            </a:r>
+          </a:p>
+        </p:txBody>
+      </p:sp>
+      <p:sp>
+        <p:nvSpPr>
+          <p:cNvPr id="14" name="TextBox 13"/>
           <p:cNvSpPr txBox="1"/>
           <p:nvPr/>
         </p:nvSpPr>
         <p:spPr>
           <a:xfrm>
-            <a:off x="7909560" y="2331720"/>
-            <a:ext cx="3566160" cy="640080"/>
+            <a:off x="6464808" y="2194560"/>
+            <a:ext cx="4992624" cy="502920"/>
           </a:xfrm>
           <a:prstGeom prst="rect">
             <a:avLst/>
@@ -7966,36 +7930,82 @@
               </a:spcAft>
             </a:pPr>
             <a:r>
-              <a:rPr sz="1200" b="0" i="0">
-                <a:solidFill>
-                  <a:srgbClr val="20242E"/>
-                </a:solidFill>
-                <a:latin typeface="Inter"/>
-              </a:rPr>
-              <a:t>🟢🟡🔴  </a:t>
-            </a:r>
-            <a:r>
-              <a:rPr sz="1200" b="0" i="0">
-                <a:solidFill>
-                  <a:srgbClr val="20242E"/>
-                </a:solidFill>
-                <a:latin typeface="Inter"/>
-              </a:rPr>
-              <a:t>het origen vragen &amp; zeggen (soy de + país)</a:t>
-            </a:r>
-          </a:p>
-        </p:txBody>
-      </p:sp>
-      <p:sp>
-        <p:nvSpPr>
-          <p:cNvPr id="13" name="TextBox 12"/>
+              <a:rPr sz="900" b="0" i="0">
+                <a:solidFill>
+                  <a:srgbClr val="6A6E78"/>
+                </a:solidFill>
+                <a:latin typeface="Inter"/>
+              </a:rPr>
+              <a:t>Me llamo… · (Yo) soy… · Encantado/a · Soy de… (país) · Soy español/a · mexicano/a · belga</a:t>
+            </a:r>
+          </a:p>
+        </p:txBody>
+      </p:sp>
+      <p:sp>
+        <p:nvSpPr>
+          <p:cNvPr id="15" name="Rounded Rectangle 14"/>
+          <p:cNvSpPr/>
+          <p:nvPr/>
+        </p:nvSpPr>
+        <p:spPr>
+          <a:xfrm>
+            <a:off x="502920" y="2898648"/>
+            <a:ext cx="5394960" cy="1060704"/>
+          </a:xfrm>
+          <a:prstGeom prst="roundRect">
+            <a:avLst>
+              <a:gd name="adj" fmla="val 5500"/>
+            </a:avLst>
+          </a:prstGeom>
+          <a:solidFill>
+            <a:srgbClr val="FBEAEC"/>
+          </a:solidFill>
+          <a:ln w="15240">
+            <a:solidFill>
+              <a:srgbClr val="D64550"/>
+            </a:solidFill>
+          </a:ln>
+          <a:effectLst/>
+          <a:effectLst>
+            <a:outerShdw blurRad="90000" dist="38000" dir="5400000" rotWithShape="0">
+              <a:srgbClr val="20242E">
+                <a:alpha val="22000"/>
+              </a:srgbClr>
+            </a:outerShdw>
+          </a:effectLst>
+        </p:spPr>
+        <p:style>
+          <a:lnRef idx="1">
+            <a:schemeClr val="accent1"/>
+          </a:lnRef>
+          <a:fillRef idx="3">
+            <a:schemeClr val="accent1"/>
+          </a:fillRef>
+          <a:effectRef idx="2">
+            <a:schemeClr val="accent1"/>
+          </a:effectRef>
+          <a:fontRef idx="minor">
+            <a:schemeClr val="lt1"/>
+          </a:fontRef>
+        </p:style>
+        <p:txBody>
+          <a:bodyPr rtlCol="0" anchor="ctr"/>
+          <a:lstStyle/>
+          <a:p>
+            <a:pPr algn="ctr"/>
+          </a:p>
+        </p:txBody>
+      </p:sp>
+      <p:sp>
+        <p:nvSpPr>
+          <p:cNvPr id="16" name="TextBox 15"/>
           <p:cNvSpPr txBox="1"/>
           <p:nvPr/>
         </p:nvSpPr>
         <p:spPr>
           <a:xfrm>
-            <a:off x="7909560" y="2990088"/>
-            <a:ext cx="3566160" cy="640080"/>
+            <a:off x="704088" y="3008376"/>
+            <a:ext cx="4992624" cy="365760"/>
           </a:xfrm>
           <a:prstGeom prst="rect">
             <a:avLst/>
@@ -8020,36 +8030,36 @@
               </a:spcAft>
             </a:pPr>
             <a:r>
-              <a:rPr sz="1200" b="0" i="0">
+              <a:rPr sz="1250" b="1" i="0">
                 <a:solidFill>
                   <a:srgbClr val="20242E"/>
                 </a:solidFill>
-                <a:latin typeface="Inter"/>
-              </a:rPr>
-              <a:t>🟢🟡🔴  </a:t>
-            </a:r>
-            <a:r>
-              <a:rPr sz="1200" b="0" i="0">
-                <a:solidFill>
-                  <a:srgbClr val="20242E"/>
-                </a:solidFill>
-                <a:latin typeface="Inter"/>
-              </a:rPr>
-              <a:t>de nationaliteit geven (♂/♀, kleine letter)</a:t>
-            </a:r>
-          </a:p>
-        </p:txBody>
-      </p:sp>
-      <p:sp>
-        <p:nvSpPr>
-          <p:cNvPr id="14" name="TextBox 13"/>
+                <a:latin typeface="Bricolage Grotesque"/>
+              </a:rPr>
+              <a:t>Pedir y dar información personal</a:t>
+            </a:r>
+            <a:r>
+              <a:rPr sz="900" b="1" i="0">
+                <a:solidFill>
+                  <a:srgbClr val="A8323B"/>
+                </a:solidFill>
+                <a:latin typeface="Inter"/>
+              </a:rPr>
+              <a:t>  ▲ nivel+</a:t>
+            </a:r>
+          </a:p>
+        </p:txBody>
+      </p:sp>
+      <p:sp>
+        <p:nvSpPr>
+          <p:cNvPr id="17" name="TextBox 16"/>
           <p:cNvSpPr txBox="1"/>
           <p:nvPr/>
         </p:nvSpPr>
         <p:spPr>
           <a:xfrm>
-            <a:off x="7909560" y="3648456"/>
-            <a:ext cx="3566160" cy="640080"/>
+            <a:off x="704088" y="3401568"/>
+            <a:ext cx="4992624" cy="502920"/>
           </a:xfrm>
           <a:prstGeom prst="rect">
             <a:avLst/>
@@ -8074,36 +8084,82 @@
               </a:spcAft>
             </a:pPr>
             <a:r>
-              <a:rPr sz="1200" b="0" i="0">
-                <a:solidFill>
-                  <a:srgbClr val="20242E"/>
-                </a:solidFill>
-                <a:latin typeface="Inter"/>
-              </a:rPr>
-              <a:t>🟢🟡🔴  </a:t>
-            </a:r>
-            <a:r>
-              <a:rPr sz="1200" b="0" i="0">
-                <a:solidFill>
-                  <a:srgbClr val="20242E"/>
-                </a:solidFill>
-                <a:latin typeface="Inter"/>
-              </a:rPr>
-              <a:t>zeggen welke talen ik spreek (hablo…)</a:t>
-            </a:r>
-          </a:p>
-        </p:txBody>
-      </p:sp>
-      <p:sp>
-        <p:nvSpPr>
-          <p:cNvPr id="15" name="TextBox 14"/>
+              <a:rPr sz="900" b="0" i="0">
+                <a:solidFill>
+                  <a:srgbClr val="6A6E78"/>
+                </a:solidFill>
+                <a:latin typeface="Inter"/>
+              </a:rPr>
+              <a:t>¿Cómo te llamas? · ¿Y tú? · ¿De dónde eres? · ¿De qué país? · ¿Qué idiomas hablas?</a:t>
+            </a:r>
+          </a:p>
+        </p:txBody>
+      </p:sp>
+      <p:sp>
+        <p:nvSpPr>
+          <p:cNvPr id="18" name="Rounded Rectangle 17"/>
+          <p:cNvSpPr/>
+          <p:nvPr/>
+        </p:nvSpPr>
+        <p:spPr>
+          <a:xfrm>
+            <a:off x="6263640" y="2898648"/>
+            <a:ext cx="5394960" cy="1060704"/>
+          </a:xfrm>
+          <a:prstGeom prst="roundRect">
+            <a:avLst>
+              <a:gd name="adj" fmla="val 5500"/>
+            </a:avLst>
+          </a:prstGeom>
+          <a:solidFill>
+            <a:srgbClr val="FFFFFF"/>
+          </a:solidFill>
+          <a:ln w="15240">
+            <a:solidFill>
+              <a:srgbClr val="E4E3DE"/>
+            </a:solidFill>
+          </a:ln>
+          <a:effectLst/>
+          <a:effectLst>
+            <a:outerShdw blurRad="90000" dist="38000" dir="5400000" rotWithShape="0">
+              <a:srgbClr val="20242E">
+                <a:alpha val="22000"/>
+              </a:srgbClr>
+            </a:outerShdw>
+          </a:effectLst>
+        </p:spPr>
+        <p:style>
+          <a:lnRef idx="1">
+            <a:schemeClr val="accent1"/>
+          </a:lnRef>
+          <a:fillRef idx="3">
+            <a:schemeClr val="accent1"/>
+          </a:fillRef>
+          <a:effectRef idx="2">
+            <a:schemeClr val="accent1"/>
+          </a:effectRef>
+          <a:fontRef idx="minor">
+            <a:schemeClr val="lt1"/>
+          </a:fontRef>
+        </p:style>
+        <p:txBody>
+          <a:bodyPr rtlCol="0" anchor="ctr"/>
+          <a:lstStyle/>
+          <a:p>
+            <a:pPr algn="ctr"/>
+          </a:p>
+        </p:txBody>
+      </p:sp>
+      <p:sp>
+        <p:nvSpPr>
+          <p:cNvPr id="19" name="TextBox 18"/>
           <p:cNvSpPr txBox="1"/>
           <p:nvPr/>
         </p:nvSpPr>
         <p:spPr>
           <a:xfrm>
-            <a:off x="7909560" y="4306824"/>
-            <a:ext cx="3566160" cy="640080"/>
+            <a:off x="6464808" y="3008376"/>
+            <a:ext cx="4992624" cy="365760"/>
           </a:xfrm>
           <a:prstGeom prst="rect">
             <a:avLst/>
@@ -8128,36 +8184,36 @@
               </a:spcAft>
             </a:pPr>
             <a:r>
-              <a:rPr sz="1200" b="0" i="0">
+              <a:rPr sz="1250" b="1" i="0">
                 <a:solidFill>
                   <a:srgbClr val="20242E"/>
                 </a:solidFill>
-                <a:latin typeface="Inter"/>
-              </a:rPr>
-              <a:t>🟢🟡🔴  </a:t>
-            </a:r>
-            <a:r>
-              <a:rPr sz="1200" b="0" i="0">
-                <a:solidFill>
-                  <a:srgbClr val="20242E"/>
-                </a:solidFill>
-                <a:latin typeface="Inter"/>
-              </a:rPr>
-              <a:t>landen van het mundo hispano situeren</a:t>
-            </a:r>
-          </a:p>
-        </p:txBody>
-      </p:sp>
-      <p:sp>
-        <p:nvSpPr>
-          <p:cNvPr id="16" name="TextBox 15"/>
+                <a:latin typeface="Bricolage Grotesque"/>
+              </a:rPr>
+              <a:t>Reaccionar con cortesía</a:t>
+            </a:r>
+            <a:r>
+              <a:rPr sz="900" b="1" i="0">
+                <a:solidFill>
+                  <a:srgbClr val="A8323B"/>
+                </a:solidFill>
+                <a:latin typeface="Inter"/>
+              </a:rPr>
+              <a:t/>
+            </a:r>
+          </a:p>
+        </p:txBody>
+      </p:sp>
+      <p:sp>
+        <p:nvSpPr>
+          <p:cNvPr id="20" name="TextBox 19"/>
           <p:cNvSpPr txBox="1"/>
           <p:nvPr/>
         </p:nvSpPr>
         <p:spPr>
           <a:xfrm>
-            <a:off x="7909560" y="5029200"/>
-            <a:ext cx="3566160" cy="640080"/>
+            <a:off x="6464808" y="3401568"/>
+            <a:ext cx="4992624" cy="502920"/>
           </a:xfrm>
           <a:prstGeom prst="rect">
             <a:avLst/>
@@ -8182,42 +8238,636 @@
               </a:spcAft>
             </a:pPr>
             <a:r>
-              <a:rPr sz="1200" b="1" i="0">
+              <a:rPr sz="900" b="0" i="0">
+                <a:solidFill>
+                  <a:srgbClr val="6A6E78"/>
+                </a:solidFill>
+                <a:latin typeface="Inter"/>
+              </a:rPr>
+              <a:t>Por favor · Gracias · Muchas gracias · De nada · Perdona</a:t>
+            </a:r>
+          </a:p>
+        </p:txBody>
+      </p:sp>
+      <p:sp>
+        <p:nvSpPr>
+          <p:cNvPr id="21" name="Rounded Rectangle 20"/>
+          <p:cNvSpPr/>
+          <p:nvPr/>
+        </p:nvSpPr>
+        <p:spPr>
+          <a:xfrm>
+            <a:off x="502920" y="4105656"/>
+            <a:ext cx="5394960" cy="1060704"/>
+          </a:xfrm>
+          <a:prstGeom prst="roundRect">
+            <a:avLst>
+              <a:gd name="adj" fmla="val 5500"/>
+            </a:avLst>
+          </a:prstGeom>
+          <a:solidFill>
+            <a:srgbClr val="FFFFFF"/>
+          </a:solidFill>
+          <a:ln w="15240">
+            <a:solidFill>
+              <a:srgbClr val="E4E3DE"/>
+            </a:solidFill>
+          </a:ln>
+          <a:effectLst/>
+          <a:effectLst>
+            <a:outerShdw blurRad="90000" dist="38000" dir="5400000" rotWithShape="0">
+              <a:srgbClr val="20242E">
+                <a:alpha val="22000"/>
+              </a:srgbClr>
+            </a:outerShdw>
+          </a:effectLst>
+        </p:spPr>
+        <p:style>
+          <a:lnRef idx="1">
+            <a:schemeClr val="accent1"/>
+          </a:lnRef>
+          <a:fillRef idx="3">
+            <a:schemeClr val="accent1"/>
+          </a:fillRef>
+          <a:effectRef idx="2">
+            <a:schemeClr val="accent1"/>
+          </a:effectRef>
+          <a:fontRef idx="minor">
+            <a:schemeClr val="lt1"/>
+          </a:fontRef>
+        </p:style>
+        <p:txBody>
+          <a:bodyPr rtlCol="0" anchor="ctr"/>
+          <a:lstStyle/>
+          <a:p>
+            <a:pPr algn="ctr"/>
+          </a:p>
+        </p:txBody>
+      </p:sp>
+      <p:sp>
+        <p:nvSpPr>
+          <p:cNvPr id="22" name="TextBox 21"/>
+          <p:cNvSpPr txBox="1"/>
+          <p:nvPr/>
+        </p:nvSpPr>
+        <p:spPr>
+          <a:xfrm>
+            <a:off x="704088" y="4215384"/>
+            <a:ext cx="4992624" cy="365760"/>
+          </a:xfrm>
+          <a:prstGeom prst="rect">
+            <a:avLst/>
+          </a:prstGeom>
+          <a:noFill/>
+        </p:spPr>
+        <p:txBody>
+          <a:bodyPr wrap="square" anchor="t" lIns="38100" rIns="38100" tIns="25400" bIns="25400">
+            <a:spAutoFit/>
+          </a:bodyPr>
+          <a:lstStyle/>
+          <a:p>
+            <a:pPr algn="l">
+              <a:lnSpc>
+                <a:spcPct val="106000"/>
+              </a:lnSpc>
+              <a:spcBef>
+                <a:spcPts val="0"/>
+              </a:spcBef>
+              <a:spcAft>
+                <a:spcPts val="200"/>
+              </a:spcAft>
+            </a:pPr>
+            <a:r>
+              <a:rPr sz="1250" b="1" i="0">
+                <a:solidFill>
+                  <a:srgbClr val="20242E"/>
+                </a:solidFill>
+                <a:latin typeface="Bricolage Grotesque"/>
+              </a:rPr>
+              <a:t>Preguntar y decir cómo estoy</a:t>
+            </a:r>
+            <a:r>
+              <a:rPr sz="900" b="1" i="0">
                 <a:solidFill>
                   <a:srgbClr val="A8323B"/>
                 </a:solidFill>
+                <a:latin typeface="Inter"/>
+              </a:rPr>
+              <a:t/>
+            </a:r>
+          </a:p>
+        </p:txBody>
+      </p:sp>
+      <p:sp>
+        <p:nvSpPr>
+          <p:cNvPr id="23" name="TextBox 22"/>
+          <p:cNvSpPr txBox="1"/>
+          <p:nvPr/>
+        </p:nvSpPr>
+        <p:spPr>
+          <a:xfrm>
+            <a:off x="704088" y="4608576"/>
+            <a:ext cx="4992624" cy="502920"/>
+          </a:xfrm>
+          <a:prstGeom prst="rect">
+            <a:avLst/>
+          </a:prstGeom>
+          <a:noFill/>
+        </p:spPr>
+        <p:txBody>
+          <a:bodyPr wrap="square" anchor="t" lIns="38100" rIns="38100" tIns="25400" bIns="25400">
+            <a:spAutoFit/>
+          </a:bodyPr>
+          <a:lstStyle/>
+          <a:p>
+            <a:pPr algn="l">
+              <a:lnSpc>
+                <a:spcPct val="106000"/>
+              </a:lnSpc>
+              <a:spcBef>
+                <a:spcPts val="0"/>
+              </a:spcBef>
+              <a:spcAft>
+                <a:spcPts val="200"/>
+              </a:spcAft>
+            </a:pPr>
+            <a:r>
+              <a:rPr sz="900" b="0" i="0">
+                <a:solidFill>
+                  <a:srgbClr val="6A6E78"/>
+                </a:solidFill>
+                <a:latin typeface="Inter"/>
+              </a:rPr>
+              <a:t>¿Qué tal? · ¿Cómo estás? · Estoy bien / cansado-a / ocupado-a · Regular</a:t>
+            </a:r>
+          </a:p>
+        </p:txBody>
+      </p:sp>
+      <p:sp>
+        <p:nvSpPr>
+          <p:cNvPr id="24" name="Rounded Rectangle 23"/>
+          <p:cNvSpPr/>
+          <p:nvPr/>
+        </p:nvSpPr>
+        <p:spPr>
+          <a:xfrm>
+            <a:off x="6263640" y="4105656"/>
+            <a:ext cx="5394960" cy="1060704"/>
+          </a:xfrm>
+          <a:prstGeom prst="roundRect">
+            <a:avLst>
+              <a:gd name="adj" fmla="val 5500"/>
+            </a:avLst>
+          </a:prstGeom>
+          <a:solidFill>
+            <a:srgbClr val="FBEAEC"/>
+          </a:solidFill>
+          <a:ln w="15240">
+            <a:solidFill>
+              <a:srgbClr val="D64550"/>
+            </a:solidFill>
+          </a:ln>
+          <a:effectLst/>
+          <a:effectLst>
+            <a:outerShdw blurRad="90000" dist="38000" dir="5400000" rotWithShape="0">
+              <a:srgbClr val="20242E">
+                <a:alpha val="22000"/>
+              </a:srgbClr>
+            </a:outerShdw>
+          </a:effectLst>
+        </p:spPr>
+        <p:style>
+          <a:lnRef idx="1">
+            <a:schemeClr val="accent1"/>
+          </a:lnRef>
+          <a:fillRef idx="3">
+            <a:schemeClr val="accent1"/>
+          </a:fillRef>
+          <a:effectRef idx="2">
+            <a:schemeClr val="accent1"/>
+          </a:effectRef>
+          <a:fontRef idx="minor">
+            <a:schemeClr val="lt1"/>
+          </a:fontRef>
+        </p:style>
+        <p:txBody>
+          <a:bodyPr rtlCol="0" anchor="ctr"/>
+          <a:lstStyle/>
+          <a:p>
+            <a:pPr algn="ctr"/>
+          </a:p>
+        </p:txBody>
+      </p:sp>
+      <p:sp>
+        <p:nvSpPr>
+          <p:cNvPr id="25" name="TextBox 24"/>
+          <p:cNvSpPr txBox="1"/>
+          <p:nvPr/>
+        </p:nvSpPr>
+        <p:spPr>
+          <a:xfrm>
+            <a:off x="6464808" y="4215384"/>
+            <a:ext cx="4992624" cy="365760"/>
+          </a:xfrm>
+          <a:prstGeom prst="rect">
+            <a:avLst/>
+          </a:prstGeom>
+          <a:noFill/>
+        </p:spPr>
+        <p:txBody>
+          <a:bodyPr wrap="square" anchor="t" lIns="38100" rIns="38100" tIns="25400" bIns="25400">
+            <a:spAutoFit/>
+          </a:bodyPr>
+          <a:lstStyle/>
+          <a:p>
+            <a:pPr algn="l">
+              <a:lnSpc>
+                <a:spcPct val="106000"/>
+              </a:lnSpc>
+              <a:spcBef>
+                <a:spcPts val="0"/>
+              </a:spcBef>
+              <a:spcAft>
+                <a:spcPts val="200"/>
+              </a:spcAft>
+            </a:pPr>
+            <a:r>
+              <a:rPr sz="1250" b="1" i="0">
+                <a:solidFill>
+                  <a:srgbClr val="20242E"/>
+                </a:solidFill>
                 <a:latin typeface="Bricolage Grotesque"/>
               </a:rPr>
-              <a:t>🎮 Repasa jugando</a:t>
-            </a:r>
-          </a:p>
-          <a:p>
-            <a:pPr algn="l">
-              <a:lnSpc>
-                <a:spcPct val="106000"/>
-              </a:lnSpc>
-              <a:spcBef>
-                <a:spcPts val="0"/>
-              </a:spcBef>
-              <a:spcAft>
-                <a:spcPts val="200"/>
-              </a:spcAft>
-            </a:pPr>
-            <a:r>
-              <a:rPr sz="1100" b="0" i="1">
+              <a:t>Pedir algo</a:t>
+            </a:r>
+            <a:r>
+              <a:rPr sz="900" b="1" i="0">
+                <a:solidFill>
+                  <a:srgbClr val="A8323B"/>
+                </a:solidFill>
+                <a:latin typeface="Inter"/>
+              </a:rPr>
+              <a:t>  ● NUEVA</a:t>
+            </a:r>
+          </a:p>
+        </p:txBody>
+      </p:sp>
+      <p:sp>
+        <p:nvSpPr>
+          <p:cNvPr id="26" name="TextBox 25"/>
+          <p:cNvSpPr txBox="1"/>
+          <p:nvPr/>
+        </p:nvSpPr>
+        <p:spPr>
+          <a:xfrm>
+            <a:off x="6464808" y="4608576"/>
+            <a:ext cx="4992624" cy="502920"/>
+          </a:xfrm>
+          <a:prstGeom prst="rect">
+            <a:avLst/>
+          </a:prstGeom>
+          <a:noFill/>
+        </p:spPr>
+        <p:txBody>
+          <a:bodyPr wrap="square" anchor="t" lIns="38100" rIns="38100" tIns="25400" bIns="25400">
+            <a:spAutoFit/>
+          </a:bodyPr>
+          <a:lstStyle/>
+          <a:p>
+            <a:pPr algn="l">
+              <a:lnSpc>
+                <a:spcPct val="106000"/>
+              </a:lnSpc>
+              <a:spcBef>
+                <a:spcPts val="0"/>
+              </a:spcBef>
+              <a:spcAft>
+                <a:spcPts val="200"/>
+              </a:spcAft>
+            </a:pPr>
+            <a:r>
+              <a:rPr sz="900" b="0" i="0">
                 <a:solidFill>
                   <a:srgbClr val="6A6E78"/>
                 </a:solidFill>
                 <a:latin typeface="Inter"/>
               </a:rPr>
-              <a:t>online op de hub · wereldkaart</a:t>
-            </a:r>
-          </a:p>
-        </p:txBody>
-      </p:sp>
-      <p:sp>
-        <p:nvSpPr>
-          <p:cNvPr id="17" name="Rectangle 16"/>
+              <a:t>…, por favor · ¿Me da…?</a:t>
+            </a:r>
+          </a:p>
+        </p:txBody>
+      </p:sp>
+      <p:sp>
+        <p:nvSpPr>
+          <p:cNvPr id="27" name="Rounded Rectangle 26"/>
+          <p:cNvSpPr/>
+          <p:nvPr/>
+        </p:nvSpPr>
+        <p:spPr>
+          <a:xfrm>
+            <a:off x="502920" y="5312664"/>
+            <a:ext cx="5394960" cy="1060704"/>
+          </a:xfrm>
+          <a:prstGeom prst="roundRect">
+            <a:avLst>
+              <a:gd name="adj" fmla="val 5500"/>
+            </a:avLst>
+          </a:prstGeom>
+          <a:solidFill>
+            <a:srgbClr val="FBEAEC"/>
+          </a:solidFill>
+          <a:ln w="15240">
+            <a:solidFill>
+              <a:srgbClr val="D64550"/>
+            </a:solidFill>
+          </a:ln>
+          <a:effectLst/>
+          <a:effectLst>
+            <a:outerShdw blurRad="90000" dist="38000" dir="5400000" rotWithShape="0">
+              <a:srgbClr val="20242E">
+                <a:alpha val="22000"/>
+              </a:srgbClr>
+            </a:outerShdw>
+          </a:effectLst>
+        </p:spPr>
+        <p:style>
+          <a:lnRef idx="1">
+            <a:schemeClr val="accent1"/>
+          </a:lnRef>
+          <a:fillRef idx="3">
+            <a:schemeClr val="accent1"/>
+          </a:fillRef>
+          <a:effectRef idx="2">
+            <a:schemeClr val="accent1"/>
+          </a:effectRef>
+          <a:fontRef idx="minor">
+            <a:schemeClr val="lt1"/>
+          </a:fontRef>
+        </p:style>
+        <p:txBody>
+          <a:bodyPr rtlCol="0" anchor="ctr"/>
+          <a:lstStyle/>
+          <a:p>
+            <a:pPr algn="ctr"/>
+          </a:p>
+        </p:txBody>
+      </p:sp>
+      <p:sp>
+        <p:nvSpPr>
+          <p:cNvPr id="28" name="TextBox 27"/>
+          <p:cNvSpPr txBox="1"/>
+          <p:nvPr/>
+        </p:nvSpPr>
+        <p:spPr>
+          <a:xfrm>
+            <a:off x="704088" y="5422392"/>
+            <a:ext cx="4992624" cy="365760"/>
+          </a:xfrm>
+          <a:prstGeom prst="rect">
+            <a:avLst/>
+          </a:prstGeom>
+          <a:noFill/>
+        </p:spPr>
+        <p:txBody>
+          <a:bodyPr wrap="square" anchor="t" lIns="38100" rIns="38100" tIns="25400" bIns="25400">
+            <a:spAutoFit/>
+          </a:bodyPr>
+          <a:lstStyle/>
+          <a:p>
+            <a:pPr algn="l">
+              <a:lnSpc>
+                <a:spcPct val="106000"/>
+              </a:lnSpc>
+              <a:spcBef>
+                <a:spcPts val="0"/>
+              </a:spcBef>
+              <a:spcAft>
+                <a:spcPts val="200"/>
+              </a:spcAft>
+            </a:pPr>
+            <a:r>
+              <a:rPr sz="1250" b="1" i="0">
+                <a:solidFill>
+                  <a:srgbClr val="20242E"/>
+                </a:solidFill>
+                <a:latin typeface="Bricolage Grotesque"/>
+              </a:rPr>
+              <a:t>Contar (números 0–20)</a:t>
+            </a:r>
+            <a:r>
+              <a:rPr sz="900" b="1" i="0">
+                <a:solidFill>
+                  <a:srgbClr val="A8323B"/>
+                </a:solidFill>
+                <a:latin typeface="Inter"/>
+              </a:rPr>
+              <a:t>  ● NUEVA</a:t>
+            </a:r>
+          </a:p>
+        </p:txBody>
+      </p:sp>
+      <p:sp>
+        <p:nvSpPr>
+          <p:cNvPr id="29" name="TextBox 28"/>
+          <p:cNvSpPr txBox="1"/>
+          <p:nvPr/>
+        </p:nvSpPr>
+        <p:spPr>
+          <a:xfrm>
+            <a:off x="704088" y="5815584"/>
+            <a:ext cx="4992624" cy="502920"/>
+          </a:xfrm>
+          <a:prstGeom prst="rect">
+            <a:avLst/>
+          </a:prstGeom>
+          <a:noFill/>
+        </p:spPr>
+        <p:txBody>
+          <a:bodyPr wrap="square" anchor="t" lIns="38100" rIns="38100" tIns="25400" bIns="25400">
+            <a:spAutoFit/>
+          </a:bodyPr>
+          <a:lstStyle/>
+          <a:p>
+            <a:pPr algn="l">
+              <a:lnSpc>
+                <a:spcPct val="106000"/>
+              </a:lnSpc>
+              <a:spcBef>
+                <a:spcPts val="0"/>
+              </a:spcBef>
+              <a:spcAft>
+                <a:spcPts val="200"/>
+              </a:spcAft>
+            </a:pPr>
+            <a:r>
+              <a:rPr sz="900" b="0" i="0">
+                <a:solidFill>
+                  <a:srgbClr val="6A6E78"/>
+                </a:solidFill>
+                <a:latin typeface="Inter"/>
+              </a:rPr>
+              <a:t>uno · dos · tres · cinco · diez · veinte</a:t>
+            </a:r>
+          </a:p>
+        </p:txBody>
+      </p:sp>
+      <p:sp>
+        <p:nvSpPr>
+          <p:cNvPr id="30" name="Rounded Rectangle 29"/>
+          <p:cNvSpPr/>
+          <p:nvPr/>
+        </p:nvSpPr>
+        <p:spPr>
+          <a:xfrm>
+            <a:off x="6263640" y="5312664"/>
+            <a:ext cx="5394960" cy="1060704"/>
+          </a:xfrm>
+          <a:prstGeom prst="roundRect">
+            <a:avLst>
+              <a:gd name="adj" fmla="val 5500"/>
+            </a:avLst>
+          </a:prstGeom>
+          <a:solidFill>
+            <a:srgbClr val="FBEAEC"/>
+          </a:solidFill>
+          <a:ln w="15240">
+            <a:solidFill>
+              <a:srgbClr val="D64550"/>
+            </a:solidFill>
+          </a:ln>
+          <a:effectLst/>
+          <a:effectLst>
+            <a:outerShdw blurRad="90000" dist="38000" dir="5400000" rotWithShape="0">
+              <a:srgbClr val="20242E">
+                <a:alpha val="22000"/>
+              </a:srgbClr>
+            </a:outerShdw>
+          </a:effectLst>
+        </p:spPr>
+        <p:style>
+          <a:lnRef idx="1">
+            <a:schemeClr val="accent1"/>
+          </a:lnRef>
+          <a:fillRef idx="3">
+            <a:schemeClr val="accent1"/>
+          </a:fillRef>
+          <a:effectRef idx="2">
+            <a:schemeClr val="accent1"/>
+          </a:effectRef>
+          <a:fontRef idx="minor">
+            <a:schemeClr val="lt1"/>
+          </a:fontRef>
+        </p:style>
+        <p:txBody>
+          <a:bodyPr rtlCol="0" anchor="ctr"/>
+          <a:lstStyle/>
+          <a:p>
+            <a:pPr algn="ctr"/>
+          </a:p>
+        </p:txBody>
+      </p:sp>
+      <p:sp>
+        <p:nvSpPr>
+          <p:cNvPr id="31" name="TextBox 30"/>
+          <p:cNvSpPr txBox="1"/>
+          <p:nvPr/>
+        </p:nvSpPr>
+        <p:spPr>
+          <a:xfrm>
+            <a:off x="6464808" y="5422392"/>
+            <a:ext cx="4992624" cy="365760"/>
+          </a:xfrm>
+          <a:prstGeom prst="rect">
+            <a:avLst/>
+          </a:prstGeom>
+          <a:noFill/>
+        </p:spPr>
+        <p:txBody>
+          <a:bodyPr wrap="square" anchor="t" lIns="38100" rIns="38100" tIns="25400" bIns="25400">
+            <a:spAutoFit/>
+          </a:bodyPr>
+          <a:lstStyle/>
+          <a:p>
+            <a:pPr algn="l">
+              <a:lnSpc>
+                <a:spcPct val="106000"/>
+              </a:lnSpc>
+              <a:spcBef>
+                <a:spcPts val="0"/>
+              </a:spcBef>
+              <a:spcAft>
+                <a:spcPts val="200"/>
+              </a:spcAft>
+            </a:pPr>
+            <a:r>
+              <a:rPr sz="1250" b="1" i="0">
+                <a:solidFill>
+                  <a:srgbClr val="20242E"/>
+                </a:solidFill>
+                <a:latin typeface="Bricolage Grotesque"/>
+              </a:rPr>
+              <a:t>Gestionar la comprensión</a:t>
+            </a:r>
+            <a:r>
+              <a:rPr sz="900" b="1" i="0">
+                <a:solidFill>
+                  <a:srgbClr val="A8323B"/>
+                </a:solidFill>
+                <a:latin typeface="Inter"/>
+              </a:rPr>
+              <a:t>  ▲ nivel+</a:t>
+            </a:r>
+          </a:p>
+        </p:txBody>
+      </p:sp>
+      <p:sp>
+        <p:nvSpPr>
+          <p:cNvPr id="32" name="TextBox 31"/>
+          <p:cNvSpPr txBox="1"/>
+          <p:nvPr/>
+        </p:nvSpPr>
+        <p:spPr>
+          <a:xfrm>
+            <a:off x="6464808" y="5815584"/>
+            <a:ext cx="4992624" cy="502920"/>
+          </a:xfrm>
+          <a:prstGeom prst="rect">
+            <a:avLst/>
+          </a:prstGeom>
+          <a:noFill/>
+        </p:spPr>
+        <p:txBody>
+          <a:bodyPr wrap="square" anchor="t" lIns="38100" rIns="38100" tIns="25400" bIns="25400">
+            <a:spAutoFit/>
+          </a:bodyPr>
+          <a:lstStyle/>
+          <a:p>
+            <a:pPr algn="l">
+              <a:lnSpc>
+                <a:spcPct val="106000"/>
+              </a:lnSpc>
+              <a:spcBef>
+                <a:spcPts val="0"/>
+              </a:spcBef>
+              <a:spcAft>
+                <a:spcPts val="200"/>
+              </a:spcAft>
+            </a:pPr>
+            <a:r>
+              <a:rPr sz="900" b="0" i="0">
+                <a:solidFill>
+                  <a:srgbClr val="6A6E78"/>
+                </a:solidFill>
+                <a:latin typeface="Inter"/>
+              </a:rPr>
+              <a:t>¿Cómo? · Otra vez, por favor · ¿Puedes repetir? · Más despacio, por favor · No entiendo</a:t>
+            </a:r>
+          </a:p>
+        </p:txBody>
+      </p:sp>
+      <p:sp>
+        <p:nvSpPr>
+          <p:cNvPr id="33" name="Rectangle 32"/>
           <p:cNvSpPr/>
           <p:nvPr/>
         </p:nvSpPr>
@@ -8261,7 +8911,7 @@
       </p:sp>
       <p:sp>
         <p:nvSpPr>
-          <p:cNvPr id="18" name="TextBox 17"/>
+          <p:cNvPr id="34" name="TextBox 33"/>
           <p:cNvSpPr txBox="1"/>
           <p:nvPr/>
         </p:nvSpPr>
@@ -8315,7 +8965,7 @@
       </p:sp>
       <p:sp>
         <p:nvSpPr>
-          <p:cNvPr id="19" name="TextBox 18"/>
+          <p:cNvPr id="35" name="TextBox 34"/>
           <p:cNvSpPr txBox="1"/>
           <p:nvPr/>
         </p:nvSpPr>
@@ -8360,7 +9010,7 @@
       </p:sp>
       <p:sp>
         <p:nvSpPr>
-          <p:cNvPr id="20" name="TextBox 19"/>
+          <p:cNvPr id="36" name="TextBox 35"/>
           <p:cNvSpPr txBox="1"/>
           <p:nvPr/>
         </p:nvSpPr>
@@ -8399,6 +9049,1126 @@
                 <a:latin typeface="Inter"/>
               </a:rPr>
               <a:t>13</a:t>
+            </a:r>
+          </a:p>
+        </p:txBody>
+      </p:sp>
+    </p:spTree>
+  </p:cSld>
+  <p:clrMapOvr>
+    <a:masterClrMapping/>
+  </p:clrMapOvr>
+</p:sld>
+</file>
+
+<file path=ppt/slides/slide14.xml><?xml version="1.0" encoding="utf-8"?>
+<p:sld xmlns:a="http://schemas.openxmlformats.org/drawingml/2006/main" xmlns:p="http://schemas.openxmlformats.org/presentationml/2006/main" xmlns:r="http://schemas.openxmlformats.org/officeDocument/2006/relationships">
+  <p:cSld>
+    <p:spTree>
+      <p:nvGrpSpPr>
+        <p:cNvPr id="1" name=""/>
+        <p:cNvGrpSpPr/>
+        <p:nvPr/>
+      </p:nvGrpSpPr>
+      <p:grpSpPr/>
+      <p:sp>
+        <p:nvSpPr>
+          <p:cNvPr id="2" name="Rectangle 1"/>
+          <p:cNvSpPr/>
+          <p:nvPr/>
+        </p:nvSpPr>
+        <p:spPr>
+          <a:xfrm>
+            <a:off x="0" y="0"/>
+            <a:ext cx="12191695" cy="6858000"/>
+          </a:xfrm>
+          <a:prstGeom prst="rect">
+            <a:avLst/>
+          </a:prstGeom>
+          <a:solidFill>
+            <a:srgbClr val="FCFBF8"/>
+          </a:solidFill>
+          <a:ln>
+            <a:noFill/>
+          </a:ln>
+          <a:effectLst/>
+        </p:spPr>
+        <p:style>
+          <a:lnRef idx="1">
+            <a:schemeClr val="accent1"/>
+          </a:lnRef>
+          <a:fillRef idx="3">
+            <a:schemeClr val="accent1"/>
+          </a:fillRef>
+          <a:effectRef idx="2">
+            <a:schemeClr val="accent1"/>
+          </a:effectRef>
+          <a:fontRef idx="minor">
+            <a:schemeClr val="lt1"/>
+          </a:fontRef>
+        </p:style>
+        <p:txBody>
+          <a:bodyPr rtlCol="0" anchor="ctr"/>
+          <a:lstStyle/>
+          <a:p>
+            <a:pPr algn="ctr"/>
+          </a:p>
+        </p:txBody>
+      </p:sp>
+      <p:sp>
+        <p:nvSpPr>
+          <p:cNvPr id="3" name="Rectangle 2"/>
+          <p:cNvSpPr/>
+          <p:nvPr/>
+        </p:nvSpPr>
+        <p:spPr>
+          <a:xfrm>
+            <a:off x="0" y="0"/>
+            <a:ext cx="12191695" cy="1078992"/>
+          </a:xfrm>
+          <a:prstGeom prst="rect">
+            <a:avLst/>
+          </a:prstGeom>
+          <a:solidFill>
+            <a:srgbClr val="D64550"/>
+          </a:solidFill>
+          <a:ln>
+            <a:noFill/>
+          </a:ln>
+          <a:effectLst/>
+        </p:spPr>
+        <p:style>
+          <a:lnRef idx="1">
+            <a:schemeClr val="accent1"/>
+          </a:lnRef>
+          <a:fillRef idx="3">
+            <a:schemeClr val="accent1"/>
+          </a:fillRef>
+          <a:effectRef idx="2">
+            <a:schemeClr val="accent1"/>
+          </a:effectRef>
+          <a:fontRef idx="minor">
+            <a:schemeClr val="lt1"/>
+          </a:fontRef>
+        </p:style>
+        <p:txBody>
+          <a:bodyPr rtlCol="0" anchor="ctr"/>
+          <a:lstStyle/>
+          <a:p>
+            <a:pPr algn="ctr"/>
+          </a:p>
+        </p:txBody>
+      </p:sp>
+      <p:sp>
+        <p:nvSpPr>
+          <p:cNvPr id="4" name="Rectangle 3"/>
+          <p:cNvSpPr/>
+          <p:nvPr/>
+        </p:nvSpPr>
+        <p:spPr>
+          <a:xfrm>
+            <a:off x="0" y="1078992"/>
+            <a:ext cx="12191695" cy="54864"/>
+          </a:xfrm>
+          <a:prstGeom prst="rect">
+            <a:avLst/>
+          </a:prstGeom>
+          <a:solidFill>
+            <a:srgbClr val="A8323B"/>
+          </a:solidFill>
+          <a:ln>
+            <a:noFill/>
+          </a:ln>
+          <a:effectLst/>
+        </p:spPr>
+        <p:style>
+          <a:lnRef idx="1">
+            <a:schemeClr val="accent1"/>
+          </a:lnRef>
+          <a:fillRef idx="3">
+            <a:schemeClr val="accent1"/>
+          </a:fillRef>
+          <a:effectRef idx="2">
+            <a:schemeClr val="accent1"/>
+          </a:effectRef>
+          <a:fontRef idx="minor">
+            <a:schemeClr val="lt1"/>
+          </a:fontRef>
+        </p:style>
+        <p:txBody>
+          <a:bodyPr rtlCol="0" anchor="ctr"/>
+          <a:lstStyle/>
+          <a:p>
+            <a:pPr algn="ctr"/>
+          </a:p>
+        </p:txBody>
+      </p:sp>
+      <p:sp>
+        <p:nvSpPr>
+          <p:cNvPr id="5" name="Rounded Rectangle 4"/>
+          <p:cNvSpPr/>
+          <p:nvPr/>
+        </p:nvSpPr>
+        <p:spPr>
+          <a:xfrm>
+            <a:off x="502920" y="182880"/>
+            <a:ext cx="623620" cy="292608"/>
+          </a:xfrm>
+          <a:prstGeom prst="roundRect">
+            <a:avLst>
+              <a:gd name="adj" fmla="val 50000"/>
+            </a:avLst>
+          </a:prstGeom>
+          <a:solidFill>
+            <a:srgbClr val="FFFFFF"/>
+          </a:solidFill>
+          <a:ln>
+            <a:noFill/>
+          </a:ln>
+          <a:effectLst/>
+        </p:spPr>
+        <p:style>
+          <a:lnRef idx="1">
+            <a:schemeClr val="accent1"/>
+          </a:lnRef>
+          <a:fillRef idx="3">
+            <a:schemeClr val="accent1"/>
+          </a:fillRef>
+          <a:effectRef idx="2">
+            <a:schemeClr val="accent1"/>
+          </a:effectRef>
+          <a:fontRef idx="minor">
+            <a:schemeClr val="lt1"/>
+          </a:fontRef>
+        </p:style>
+        <p:txBody>
+          <a:bodyPr rtlCol="0" anchor="ctr" wrap="none" lIns="88900" rIns="88900" tIns="12700" bIns="12700"/>
+          <a:lstStyle/>
+          <a:p>
+            <a:pPr algn="ctr"/>
+            <a:r>
+              <a:rPr sz="1100" b="1">
+                <a:solidFill>
+                  <a:srgbClr val="D64550"/>
+                </a:solidFill>
+                <a:latin typeface="Inter"/>
+              </a:rPr>
+              <a:t>REPASO</a:t>
+            </a:r>
+          </a:p>
+        </p:txBody>
+      </p:sp>
+      <p:sp>
+        <p:nvSpPr>
+          <p:cNvPr id="6" name="TextBox 5"/>
+          <p:cNvSpPr txBox="1"/>
+          <p:nvPr/>
+        </p:nvSpPr>
+        <p:spPr>
+          <a:xfrm>
+            <a:off x="457200" y="457200"/>
+            <a:ext cx="9692640" cy="502920"/>
+          </a:xfrm>
+          <a:prstGeom prst="rect">
+            <a:avLst/>
+          </a:prstGeom>
+          <a:noFill/>
+        </p:spPr>
+        <p:txBody>
+          <a:bodyPr wrap="square" anchor="ctr" lIns="38100" rIns="38100" tIns="25400" bIns="25400">
+            <a:spAutoFit/>
+          </a:bodyPr>
+          <a:lstStyle/>
+          <a:p>
+            <a:pPr algn="l">
+              <a:lnSpc>
+                <a:spcPct val="106000"/>
+              </a:lnSpc>
+              <a:spcBef>
+                <a:spcPts val="0"/>
+              </a:spcBef>
+              <a:spcAft>
+                <a:spcPts val="200"/>
+              </a:spcAft>
+            </a:pPr>
+            <a:r>
+              <a:rPr sz="2700" b="1" i="0">
+                <a:solidFill>
+                  <a:srgbClr val="FFFFFF"/>
+                </a:solidFill>
+                <a:latin typeface="Bricolage Grotesque"/>
+              </a:rPr>
+              <a:t>Lo esencial de un vistazo</a:t>
+            </a:r>
+          </a:p>
+        </p:txBody>
+      </p:sp>
+      <p:sp>
+        <p:nvSpPr>
+          <p:cNvPr id="7" name="TextBox 6"/>
+          <p:cNvSpPr txBox="1"/>
+          <p:nvPr/>
+        </p:nvSpPr>
+        <p:spPr>
+          <a:xfrm>
+            <a:off x="502920" y="932688"/>
+            <a:ext cx="9692640" cy="274320"/>
+          </a:xfrm>
+          <a:prstGeom prst="rect">
+            <a:avLst/>
+          </a:prstGeom>
+          <a:noFill/>
+        </p:spPr>
+        <p:txBody>
+          <a:bodyPr wrap="square" anchor="t" lIns="38100" rIns="38100" tIns="25400" bIns="25400">
+            <a:spAutoFit/>
+          </a:bodyPr>
+          <a:lstStyle/>
+          <a:p>
+            <a:pPr algn="l">
+              <a:lnSpc>
+                <a:spcPct val="106000"/>
+              </a:lnSpc>
+              <a:spcBef>
+                <a:spcPts val="0"/>
+              </a:spcBef>
+              <a:spcAft>
+                <a:spcPts val="200"/>
+              </a:spcAft>
+            </a:pPr>
+            <a:r>
+              <a:rPr sz="1250" b="0" i="1">
+                <a:solidFill>
+                  <a:srgbClr val="FBEAEC"/>
+                </a:solidFill>
+                <a:latin typeface="Inter"/>
+              </a:rPr>
+              <a:t>Wat je nu kunt — semáforo</a:t>
+            </a:r>
+          </a:p>
+        </p:txBody>
+      </p:sp>
+      <p:sp>
+        <p:nvSpPr>
+          <p:cNvPr id="8" name="Rounded Rectangle 7"/>
+          <p:cNvSpPr/>
+          <p:nvPr/>
+        </p:nvSpPr>
+        <p:spPr>
+          <a:xfrm>
+            <a:off x="502920" y="1554480"/>
+            <a:ext cx="6949440" cy="4023360"/>
+          </a:xfrm>
+          <a:prstGeom prst="roundRect">
+            <a:avLst>
+              <a:gd name="adj" fmla="val 5500"/>
+            </a:avLst>
+          </a:prstGeom>
+          <a:solidFill>
+            <a:srgbClr val="FFFFFF"/>
+          </a:solidFill>
+          <a:ln w="15240">
+            <a:solidFill>
+              <a:srgbClr val="E4E3DE"/>
+            </a:solidFill>
+          </a:ln>
+          <a:effectLst/>
+          <a:effectLst>
+            <a:outerShdw blurRad="90000" dist="38000" dir="5400000" rotWithShape="0">
+              <a:srgbClr val="20242E">
+                <a:alpha val="22000"/>
+              </a:srgbClr>
+            </a:outerShdw>
+          </a:effectLst>
+        </p:spPr>
+        <p:style>
+          <a:lnRef idx="1">
+            <a:schemeClr val="accent1"/>
+          </a:lnRef>
+          <a:fillRef idx="3">
+            <a:schemeClr val="accent1"/>
+          </a:fillRef>
+          <a:effectRef idx="2">
+            <a:schemeClr val="accent1"/>
+          </a:effectRef>
+          <a:fontRef idx="minor">
+            <a:schemeClr val="lt1"/>
+          </a:fontRef>
+        </p:style>
+        <p:txBody>
+          <a:bodyPr rtlCol="0" anchor="ctr"/>
+          <a:lstStyle/>
+          <a:p>
+            <a:pPr algn="ctr"/>
+          </a:p>
+        </p:txBody>
+      </p:sp>
+      <p:sp>
+        <p:nvSpPr>
+          <p:cNvPr id="9" name="TextBox 8"/>
+          <p:cNvSpPr txBox="1"/>
+          <p:nvPr/>
+        </p:nvSpPr>
+        <p:spPr>
+          <a:xfrm>
+            <a:off x="777240" y="1737360"/>
+            <a:ext cx="6492240" cy="3657600"/>
+          </a:xfrm>
+          <a:prstGeom prst="rect">
+            <a:avLst/>
+          </a:prstGeom>
+          <a:noFill/>
+        </p:spPr>
+        <p:txBody>
+          <a:bodyPr wrap="square" anchor="t" lIns="38100" rIns="38100" tIns="25400" bIns="25400">
+            <a:spAutoFit/>
+          </a:bodyPr>
+          <a:lstStyle/>
+          <a:p>
+            <a:pPr algn="l">
+              <a:lnSpc>
+                <a:spcPct val="106000"/>
+              </a:lnSpc>
+              <a:spcBef>
+                <a:spcPts val="0"/>
+              </a:spcBef>
+              <a:spcAft>
+                <a:spcPts val="200"/>
+              </a:spcAft>
+            </a:pPr>
+            <a:r>
+              <a:rPr sz="1400" b="1" i="0">
+                <a:solidFill>
+                  <a:srgbClr val="A8323B"/>
+                </a:solidFill>
+                <a:latin typeface="Bricolage Grotesque"/>
+              </a:rPr>
+              <a:t>Zo vraag &amp; zeg je het origen</a:t>
+            </a:r>
+          </a:p>
+          <a:p>
+            <a:pPr algn="l">
+              <a:lnSpc>
+                <a:spcPct val="106000"/>
+              </a:lnSpc>
+              <a:spcBef>
+                <a:spcPts val="0"/>
+              </a:spcBef>
+              <a:spcAft>
+                <a:spcPts val="200"/>
+              </a:spcAft>
+            </a:pPr>
+            <a:r>
+              <a:rPr sz="1400" b="0" i="0">
+                <a:solidFill>
+                  <a:srgbClr val="20242E"/>
+                </a:solidFill>
+                <a:latin typeface="Inter"/>
+              </a:rPr>
+              <a:t>¿De dónde eres? → Soy de + país (Soy de Bélgica)</a:t>
+            </a:r>
+          </a:p>
+          <a:p>
+            <a:pPr algn="l">
+              <a:lnSpc>
+                <a:spcPct val="106000"/>
+              </a:lnSpc>
+              <a:spcBef>
+                <a:spcPts val="0"/>
+              </a:spcBef>
+              <a:spcAft>
+                <a:spcPts val="200"/>
+              </a:spcAft>
+            </a:pPr>
+            <a:r>
+              <a:rPr sz="1300" b="0" i="0">
+                <a:solidFill>
+                  <a:srgbClr val="20242E"/>
+                </a:solidFill>
+                <a:latin typeface="Inter"/>
+              </a:rPr>
+              <a:t>Land = met de · nationaliteit = zónder de (soy belga)</a:t>
+            </a:r>
+          </a:p>
+          <a:p>
+            <a:pPr algn="l">
+              <a:lnSpc>
+                <a:spcPct val="106000"/>
+              </a:lnSpc>
+              <a:spcBef>
+                <a:spcPts val="0"/>
+              </a:spcBef>
+              <a:spcAft>
+                <a:spcPts val="200"/>
+              </a:spcAft>
+            </a:pPr>
+            <a:r>
+              <a:rPr sz="600" b="0" i="0">
+                <a:solidFill>
+                  <a:srgbClr val="20242E"/>
+                </a:solidFill>
+                <a:latin typeface="Inter"/>
+              </a:rPr>
+              <a:t/>
+            </a:r>
+          </a:p>
+          <a:p>
+            <a:pPr algn="l">
+              <a:lnSpc>
+                <a:spcPct val="106000"/>
+              </a:lnSpc>
+              <a:spcBef>
+                <a:spcPts val="0"/>
+              </a:spcBef>
+              <a:spcAft>
+                <a:spcPts val="200"/>
+              </a:spcAft>
+            </a:pPr>
+            <a:r>
+              <a:rPr sz="1400" b="1" i="0">
+                <a:solidFill>
+                  <a:srgbClr val="A8323B"/>
+                </a:solidFill>
+                <a:latin typeface="Bricolage Grotesque"/>
+              </a:rPr>
+              <a:t>Nationaliteit &amp; talen</a:t>
+            </a:r>
+          </a:p>
+          <a:p>
+            <a:pPr algn="l">
+              <a:lnSpc>
+                <a:spcPct val="106000"/>
+              </a:lnSpc>
+              <a:spcBef>
+                <a:spcPts val="0"/>
+              </a:spcBef>
+              <a:spcAft>
+                <a:spcPts val="200"/>
+              </a:spcAft>
+            </a:pPr>
+            <a:r>
+              <a:rPr sz="1300" b="0" i="0">
+                <a:solidFill>
+                  <a:srgbClr val="20242E"/>
+                </a:solidFill>
+                <a:latin typeface="Inter"/>
+              </a:rPr>
+              <a:t>mexicano ♂ / mexicana ♀ · met kleine letter</a:t>
+            </a:r>
+          </a:p>
+          <a:p>
+            <a:pPr algn="l">
+              <a:lnSpc>
+                <a:spcPct val="106000"/>
+              </a:lnSpc>
+              <a:spcBef>
+                <a:spcPts val="0"/>
+              </a:spcBef>
+              <a:spcAft>
+                <a:spcPts val="200"/>
+              </a:spcAft>
+            </a:pPr>
+            <a:r>
+              <a:rPr sz="1300" b="0" i="0">
+                <a:solidFill>
+                  <a:srgbClr val="20242E"/>
+                </a:solidFill>
+                <a:latin typeface="Inter"/>
+              </a:rPr>
+              <a:t>Hablo español, neerlandés, francés…</a:t>
+            </a:r>
+          </a:p>
+          <a:p>
+            <a:pPr algn="l">
+              <a:lnSpc>
+                <a:spcPct val="106000"/>
+              </a:lnSpc>
+              <a:spcBef>
+                <a:spcPts val="0"/>
+              </a:spcBef>
+              <a:spcAft>
+                <a:spcPts val="200"/>
+              </a:spcAft>
+            </a:pPr>
+            <a:r>
+              <a:rPr sz="1300" b="0" i="0">
+                <a:solidFill>
+                  <a:srgbClr val="20242E"/>
+                </a:solidFill>
+                <a:latin typeface="Inter"/>
+              </a:rPr>
+              <a:t>belga · marroquí blijven gelijk (♂ = ♀)</a:t>
+            </a:r>
+          </a:p>
+        </p:txBody>
+      </p:sp>
+      <p:sp>
+        <p:nvSpPr>
+          <p:cNvPr id="10" name="Rounded Rectangle 9"/>
+          <p:cNvSpPr/>
+          <p:nvPr/>
+        </p:nvSpPr>
+        <p:spPr>
+          <a:xfrm>
+            <a:off x="7680960" y="1554480"/>
+            <a:ext cx="4023360" cy="4023360"/>
+          </a:xfrm>
+          <a:prstGeom prst="roundRect">
+            <a:avLst>
+              <a:gd name="adj" fmla="val 5500"/>
+            </a:avLst>
+          </a:prstGeom>
+          <a:solidFill>
+            <a:srgbClr val="FBEAEC"/>
+          </a:solidFill>
+          <a:ln w="15240">
+            <a:solidFill>
+              <a:srgbClr val="D64550"/>
+            </a:solidFill>
+          </a:ln>
+          <a:effectLst/>
+          <a:effectLst>
+            <a:outerShdw blurRad="90000" dist="38000" dir="5400000" rotWithShape="0">
+              <a:srgbClr val="20242E">
+                <a:alpha val="22000"/>
+              </a:srgbClr>
+            </a:outerShdw>
+          </a:effectLst>
+        </p:spPr>
+        <p:style>
+          <a:lnRef idx="1">
+            <a:schemeClr val="accent1"/>
+          </a:lnRef>
+          <a:fillRef idx="3">
+            <a:schemeClr val="accent1"/>
+          </a:fillRef>
+          <a:effectRef idx="2">
+            <a:schemeClr val="accent1"/>
+          </a:effectRef>
+          <a:fontRef idx="minor">
+            <a:schemeClr val="lt1"/>
+          </a:fontRef>
+        </p:style>
+        <p:txBody>
+          <a:bodyPr rtlCol="0" anchor="ctr"/>
+          <a:lstStyle/>
+          <a:p>
+            <a:pPr algn="ctr"/>
+          </a:p>
+        </p:txBody>
+      </p:sp>
+      <p:sp>
+        <p:nvSpPr>
+          <p:cNvPr id="11" name="TextBox 10"/>
+          <p:cNvSpPr txBox="1"/>
+          <p:nvPr/>
+        </p:nvSpPr>
+        <p:spPr>
+          <a:xfrm>
+            <a:off x="7909560" y="1737360"/>
+            <a:ext cx="3566160" cy="457200"/>
+          </a:xfrm>
+          <a:prstGeom prst="rect">
+            <a:avLst/>
+          </a:prstGeom>
+          <a:noFill/>
+        </p:spPr>
+        <p:txBody>
+          <a:bodyPr wrap="square" anchor="t" lIns="38100" rIns="38100" tIns="25400" bIns="25400">
+            <a:spAutoFit/>
+          </a:bodyPr>
+          <a:lstStyle/>
+          <a:p>
+            <a:pPr algn="l">
+              <a:lnSpc>
+                <a:spcPct val="106000"/>
+              </a:lnSpc>
+              <a:spcBef>
+                <a:spcPts val="0"/>
+              </a:spcBef>
+              <a:spcAft>
+                <a:spcPts val="200"/>
+              </a:spcAft>
+            </a:pPr>
+            <a:r>
+              <a:rPr sz="1300" b="1" i="0">
+                <a:solidFill>
+                  <a:srgbClr val="A8323B"/>
+                </a:solidFill>
+                <a:latin typeface="Bricolage Grotesque"/>
+              </a:rPr>
+              <a:t>Puedo… · Ik kan…</a:t>
+            </a:r>
+          </a:p>
+        </p:txBody>
+      </p:sp>
+      <p:sp>
+        <p:nvSpPr>
+          <p:cNvPr id="12" name="TextBox 11"/>
+          <p:cNvSpPr txBox="1"/>
+          <p:nvPr/>
+        </p:nvSpPr>
+        <p:spPr>
+          <a:xfrm>
+            <a:off x="7909560" y="2331720"/>
+            <a:ext cx="3566160" cy="640080"/>
+          </a:xfrm>
+          <a:prstGeom prst="rect">
+            <a:avLst/>
+          </a:prstGeom>
+          <a:noFill/>
+        </p:spPr>
+        <p:txBody>
+          <a:bodyPr wrap="square" anchor="t" lIns="38100" rIns="38100" tIns="25400" bIns="25400">
+            <a:spAutoFit/>
+          </a:bodyPr>
+          <a:lstStyle/>
+          <a:p>
+            <a:pPr algn="l">
+              <a:lnSpc>
+                <a:spcPct val="106000"/>
+              </a:lnSpc>
+              <a:spcBef>
+                <a:spcPts val="0"/>
+              </a:spcBef>
+              <a:spcAft>
+                <a:spcPts val="200"/>
+              </a:spcAft>
+            </a:pPr>
+            <a:r>
+              <a:rPr sz="1200" b="0" i="0">
+                <a:solidFill>
+                  <a:srgbClr val="20242E"/>
+                </a:solidFill>
+                <a:latin typeface="Inter"/>
+              </a:rPr>
+              <a:t>🟢🟡🔴  </a:t>
+            </a:r>
+            <a:r>
+              <a:rPr sz="1200" b="0" i="0">
+                <a:solidFill>
+                  <a:srgbClr val="20242E"/>
+                </a:solidFill>
+                <a:latin typeface="Inter"/>
+              </a:rPr>
+              <a:t>het origen vragen &amp; zeggen (soy de + país)</a:t>
+            </a:r>
+          </a:p>
+        </p:txBody>
+      </p:sp>
+      <p:sp>
+        <p:nvSpPr>
+          <p:cNvPr id="13" name="TextBox 12"/>
+          <p:cNvSpPr txBox="1"/>
+          <p:nvPr/>
+        </p:nvSpPr>
+        <p:spPr>
+          <a:xfrm>
+            <a:off x="7909560" y="2990088"/>
+            <a:ext cx="3566160" cy="640080"/>
+          </a:xfrm>
+          <a:prstGeom prst="rect">
+            <a:avLst/>
+          </a:prstGeom>
+          <a:noFill/>
+        </p:spPr>
+        <p:txBody>
+          <a:bodyPr wrap="square" anchor="t" lIns="38100" rIns="38100" tIns="25400" bIns="25400">
+            <a:spAutoFit/>
+          </a:bodyPr>
+          <a:lstStyle/>
+          <a:p>
+            <a:pPr algn="l">
+              <a:lnSpc>
+                <a:spcPct val="106000"/>
+              </a:lnSpc>
+              <a:spcBef>
+                <a:spcPts val="0"/>
+              </a:spcBef>
+              <a:spcAft>
+                <a:spcPts val="200"/>
+              </a:spcAft>
+            </a:pPr>
+            <a:r>
+              <a:rPr sz="1200" b="0" i="0">
+                <a:solidFill>
+                  <a:srgbClr val="20242E"/>
+                </a:solidFill>
+                <a:latin typeface="Inter"/>
+              </a:rPr>
+              <a:t>🟢🟡🔴  </a:t>
+            </a:r>
+            <a:r>
+              <a:rPr sz="1200" b="0" i="0">
+                <a:solidFill>
+                  <a:srgbClr val="20242E"/>
+                </a:solidFill>
+                <a:latin typeface="Inter"/>
+              </a:rPr>
+              <a:t>de nationaliteit geven (♂/♀, kleine letter)</a:t>
+            </a:r>
+          </a:p>
+        </p:txBody>
+      </p:sp>
+      <p:sp>
+        <p:nvSpPr>
+          <p:cNvPr id="14" name="TextBox 13"/>
+          <p:cNvSpPr txBox="1"/>
+          <p:nvPr/>
+        </p:nvSpPr>
+        <p:spPr>
+          <a:xfrm>
+            <a:off x="7909560" y="3648456"/>
+            <a:ext cx="3566160" cy="640080"/>
+          </a:xfrm>
+          <a:prstGeom prst="rect">
+            <a:avLst/>
+          </a:prstGeom>
+          <a:noFill/>
+        </p:spPr>
+        <p:txBody>
+          <a:bodyPr wrap="square" anchor="t" lIns="38100" rIns="38100" tIns="25400" bIns="25400">
+            <a:spAutoFit/>
+          </a:bodyPr>
+          <a:lstStyle/>
+          <a:p>
+            <a:pPr algn="l">
+              <a:lnSpc>
+                <a:spcPct val="106000"/>
+              </a:lnSpc>
+              <a:spcBef>
+                <a:spcPts val="0"/>
+              </a:spcBef>
+              <a:spcAft>
+                <a:spcPts val="200"/>
+              </a:spcAft>
+            </a:pPr>
+            <a:r>
+              <a:rPr sz="1200" b="0" i="0">
+                <a:solidFill>
+                  <a:srgbClr val="20242E"/>
+                </a:solidFill>
+                <a:latin typeface="Inter"/>
+              </a:rPr>
+              <a:t>🟢🟡🔴  </a:t>
+            </a:r>
+            <a:r>
+              <a:rPr sz="1200" b="0" i="0">
+                <a:solidFill>
+                  <a:srgbClr val="20242E"/>
+                </a:solidFill>
+                <a:latin typeface="Inter"/>
+              </a:rPr>
+              <a:t>zeggen welke talen ik spreek (hablo…)</a:t>
+            </a:r>
+          </a:p>
+        </p:txBody>
+      </p:sp>
+      <p:sp>
+        <p:nvSpPr>
+          <p:cNvPr id="15" name="TextBox 14"/>
+          <p:cNvSpPr txBox="1"/>
+          <p:nvPr/>
+        </p:nvSpPr>
+        <p:spPr>
+          <a:xfrm>
+            <a:off x="7909560" y="4306824"/>
+            <a:ext cx="3566160" cy="640080"/>
+          </a:xfrm>
+          <a:prstGeom prst="rect">
+            <a:avLst/>
+          </a:prstGeom>
+          <a:noFill/>
+        </p:spPr>
+        <p:txBody>
+          <a:bodyPr wrap="square" anchor="t" lIns="38100" rIns="38100" tIns="25400" bIns="25400">
+            <a:spAutoFit/>
+          </a:bodyPr>
+          <a:lstStyle/>
+          <a:p>
+            <a:pPr algn="l">
+              <a:lnSpc>
+                <a:spcPct val="106000"/>
+              </a:lnSpc>
+              <a:spcBef>
+                <a:spcPts val="0"/>
+              </a:spcBef>
+              <a:spcAft>
+                <a:spcPts val="200"/>
+              </a:spcAft>
+            </a:pPr>
+            <a:r>
+              <a:rPr sz="1200" b="0" i="0">
+                <a:solidFill>
+                  <a:srgbClr val="20242E"/>
+                </a:solidFill>
+                <a:latin typeface="Inter"/>
+              </a:rPr>
+              <a:t>🟢🟡🔴  </a:t>
+            </a:r>
+            <a:r>
+              <a:rPr sz="1200" b="0" i="0">
+                <a:solidFill>
+                  <a:srgbClr val="20242E"/>
+                </a:solidFill>
+                <a:latin typeface="Inter"/>
+              </a:rPr>
+              <a:t>landen van het mundo hispano situeren</a:t>
+            </a:r>
+          </a:p>
+        </p:txBody>
+      </p:sp>
+      <p:sp>
+        <p:nvSpPr>
+          <p:cNvPr id="16" name="TextBox 15"/>
+          <p:cNvSpPr txBox="1"/>
+          <p:nvPr/>
+        </p:nvSpPr>
+        <p:spPr>
+          <a:xfrm>
+            <a:off x="7909560" y="5029200"/>
+            <a:ext cx="3566160" cy="640080"/>
+          </a:xfrm>
+          <a:prstGeom prst="rect">
+            <a:avLst/>
+          </a:prstGeom>
+          <a:noFill/>
+        </p:spPr>
+        <p:txBody>
+          <a:bodyPr wrap="square" anchor="t" lIns="38100" rIns="38100" tIns="25400" bIns="25400">
+            <a:spAutoFit/>
+          </a:bodyPr>
+          <a:lstStyle/>
+          <a:p>
+            <a:pPr algn="l">
+              <a:lnSpc>
+                <a:spcPct val="106000"/>
+              </a:lnSpc>
+              <a:spcBef>
+                <a:spcPts val="0"/>
+              </a:spcBef>
+              <a:spcAft>
+                <a:spcPts val="200"/>
+              </a:spcAft>
+            </a:pPr>
+            <a:r>
+              <a:rPr sz="1200" b="1" i="0">
+                <a:solidFill>
+                  <a:srgbClr val="A8323B"/>
+                </a:solidFill>
+                <a:latin typeface="Bricolage Grotesque"/>
+              </a:rPr>
+              <a:t>🎮 Repasa jugando</a:t>
+            </a:r>
+          </a:p>
+          <a:p>
+            <a:pPr algn="l">
+              <a:lnSpc>
+                <a:spcPct val="106000"/>
+              </a:lnSpc>
+              <a:spcBef>
+                <a:spcPts val="0"/>
+              </a:spcBef>
+              <a:spcAft>
+                <a:spcPts val="200"/>
+              </a:spcAft>
+            </a:pPr>
+            <a:r>
+              <a:rPr sz="1100" b="0" i="1">
+                <a:solidFill>
+                  <a:srgbClr val="6A6E78"/>
+                </a:solidFill>
+                <a:latin typeface="Inter"/>
+              </a:rPr>
+              <a:t>online op de hub · wereldkaart</a:t>
+            </a:r>
+          </a:p>
+        </p:txBody>
+      </p:sp>
+      <p:sp>
+        <p:nvSpPr>
+          <p:cNvPr id="17" name="Rectangle 16"/>
+          <p:cNvSpPr/>
+          <p:nvPr/>
+        </p:nvSpPr>
+        <p:spPr>
+          <a:xfrm>
+            <a:off x="0" y="6547104"/>
+            <a:ext cx="12191695" cy="310896"/>
+          </a:xfrm>
+          <a:prstGeom prst="rect">
+            <a:avLst/>
+          </a:prstGeom>
+          <a:solidFill>
+            <a:srgbClr val="F3EEE4"/>
+          </a:solidFill>
+          <a:ln>
+            <a:noFill/>
+          </a:ln>
+          <a:effectLst/>
+        </p:spPr>
+        <p:style>
+          <a:lnRef idx="1">
+            <a:schemeClr val="accent1"/>
+          </a:lnRef>
+          <a:fillRef idx="3">
+            <a:schemeClr val="accent1"/>
+          </a:fillRef>
+          <a:effectRef idx="2">
+            <a:schemeClr val="accent1"/>
+          </a:effectRef>
+          <a:fontRef idx="minor">
+            <a:schemeClr val="lt1"/>
+          </a:fontRef>
+        </p:style>
+        <p:txBody>
+          <a:bodyPr rtlCol="0" anchor="ctr"/>
+          <a:lstStyle/>
+          <a:p>
+            <a:pPr algn="ctr"/>
+          </a:p>
+        </p:txBody>
+      </p:sp>
+      <p:sp>
+        <p:nvSpPr>
+          <p:cNvPr id="18" name="TextBox 17"/>
+          <p:cNvSpPr txBox="1"/>
+          <p:nvPr/>
+        </p:nvSpPr>
+        <p:spPr>
+          <a:xfrm>
+            <a:off x="411480" y="6565392"/>
+            <a:ext cx="5486400" cy="274320"/>
+          </a:xfrm>
+          <a:prstGeom prst="rect">
+            <a:avLst/>
+          </a:prstGeom>
+          <a:noFill/>
+        </p:spPr>
+        <p:txBody>
+          <a:bodyPr wrap="square" anchor="ctr" lIns="38100" rIns="38100" tIns="25400" bIns="25400">
+            <a:spAutoFit/>
+          </a:bodyPr>
+          <a:lstStyle/>
+          <a:p>
+            <a:pPr algn="l">
+              <a:lnSpc>
+                <a:spcPct val="106000"/>
+              </a:lnSpc>
+              <a:spcBef>
+                <a:spcPts val="0"/>
+              </a:spcBef>
+              <a:spcAft>
+                <a:spcPts val="200"/>
+              </a:spcAft>
+            </a:pPr>
+            <a:r>
+              <a:rPr sz="1100" b="1" i="0">
+                <a:solidFill>
+                  <a:srgbClr val="D64550"/>
+                </a:solidFill>
+                <a:latin typeface="Inter"/>
+              </a:rPr>
+              <a:t>● </a:t>
+            </a:r>
+            <a:r>
+              <a:rPr sz="950" b="0" i="0">
+                <a:solidFill>
+                  <a:srgbClr val="6A6E78"/>
+                </a:solidFill>
+                <a:latin typeface="Inter"/>
+              </a:rPr>
+              <a:t>U3 · NACIONALIDADES   ·   C4 · La Ruta</a:t>
+            </a:r>
+          </a:p>
+        </p:txBody>
+      </p:sp>
+      <p:sp>
+        <p:nvSpPr>
+          <p:cNvPr id="19" name="TextBox 18"/>
+          <p:cNvSpPr txBox="1"/>
+          <p:nvPr/>
+        </p:nvSpPr>
+        <p:spPr>
+          <a:xfrm>
+            <a:off x="8686800" y="6565392"/>
+            <a:ext cx="3063240" cy="274320"/>
+          </a:xfrm>
+          <a:prstGeom prst="rect">
+            <a:avLst/>
+          </a:prstGeom>
+          <a:noFill/>
+        </p:spPr>
+        <p:txBody>
+          <a:bodyPr wrap="square" anchor="ctr" lIns="38100" rIns="38100" tIns="25400" bIns="25400">
+            <a:spAutoFit/>
+          </a:bodyPr>
+          <a:lstStyle/>
+          <a:p>
+            <a:pPr algn="r">
+              <a:lnSpc>
+                <a:spcPct val="106000"/>
+              </a:lnSpc>
+              <a:spcBef>
+                <a:spcPts val="0"/>
+              </a:spcBef>
+              <a:spcAft>
+                <a:spcPts val="200"/>
+              </a:spcAft>
+            </a:pPr>
+            <a:r>
+              <a:rPr sz="900" b="0" i="1">
+                <a:solidFill>
+                  <a:srgbClr val="6A6E78"/>
+                </a:solidFill>
+                <a:latin typeface="Inter"/>
+              </a:rPr>
+              <a:t>Leerlingenversie — klik onthult</a:t>
+            </a:r>
+          </a:p>
+        </p:txBody>
+      </p:sp>
+      <p:sp>
+        <p:nvSpPr>
+          <p:cNvPr id="20" name="TextBox 19"/>
+          <p:cNvSpPr txBox="1"/>
+          <p:nvPr/>
+        </p:nvSpPr>
+        <p:spPr>
+          <a:xfrm>
+            <a:off x="11475720" y="6565392"/>
+            <a:ext cx="457200" cy="274320"/>
+          </a:xfrm>
+          <a:prstGeom prst="rect">
+            <a:avLst/>
+          </a:prstGeom>
+          <a:noFill/>
+        </p:spPr>
+        <p:txBody>
+          <a:bodyPr wrap="square" anchor="ctr" lIns="38100" rIns="38100" tIns="25400" bIns="25400">
+            <a:spAutoFit/>
+          </a:bodyPr>
+          <a:lstStyle/>
+          <a:p>
+            <a:pPr algn="r">
+              <a:lnSpc>
+                <a:spcPct val="106000"/>
+              </a:lnSpc>
+              <a:spcBef>
+                <a:spcPts val="0"/>
+              </a:spcBef>
+              <a:spcAft>
+                <a:spcPts val="200"/>
+              </a:spcAft>
+            </a:pPr>
+            <a:r>
+              <a:rPr sz="950" b="1" i="0">
+                <a:solidFill>
+                  <a:srgbClr val="A8323B"/>
+                </a:solidFill>
+                <a:latin typeface="Inter"/>
+              </a:rPr>
+              <a:t>14</a:t>
             </a:r>
           </a:p>
         </p:txBody>

--- a/03-build/pptx/C4_U3_alumno.pptx
+++ b/03-build/pptx/C4_U3_alumno.pptx
@@ -4204,7 +4204,6 @@
               <a:srgbClr val="D64550"/>
             </a:solidFill>
           </a:ln>
-          <a:effectLst/>
           <a:effectLst>
             <a:outerShdw blurRad="90000" dist="38000" dir="5400000" rotWithShape="0">
               <a:srgbClr val="20242E">
@@ -4392,7 +4391,6 @@
               <a:srgbClr val="E4E3DE"/>
             </a:solidFill>
           </a:ln>
-          <a:effectLst/>
           <a:effectLst>
             <a:outerShdw blurRad="90000" dist="38000" dir="5400000" rotWithShape="0">
               <a:srgbClr val="20242E">
@@ -5117,7 +5115,6 @@
               <a:srgbClr val="E4E3DE"/>
             </a:solidFill>
           </a:ln>
-          <a:effectLst/>
           <a:effectLst>
             <a:outerShdw blurRad="90000" dist="38000" dir="5400000" rotWithShape="0">
               <a:srgbClr val="20242E">
@@ -5261,7 +5258,6 @@
               <a:srgbClr val="E4E3DE"/>
             </a:solidFill>
           </a:ln>
-          <a:effectLst/>
           <a:effectLst>
             <a:outerShdw blurRad="90000" dist="38000" dir="5400000" rotWithShape="0">
               <a:srgbClr val="20242E">
@@ -5405,7 +5401,6 @@
               <a:srgbClr val="E4E3DE"/>
             </a:solidFill>
           </a:ln>
-          <a:effectLst/>
           <a:effectLst>
             <a:outerShdw blurRad="90000" dist="38000" dir="5400000" rotWithShape="0">
               <a:srgbClr val="20242E">
@@ -5549,7 +5544,6 @@
               <a:srgbClr val="E4E3DE"/>
             </a:solidFill>
           </a:ln>
-          <a:effectLst/>
           <a:effectLst>
             <a:outerShdw blurRad="90000" dist="38000" dir="5400000" rotWithShape="0">
               <a:srgbClr val="20242E">
@@ -5693,7 +5687,6 @@
               <a:srgbClr val="E4E3DE"/>
             </a:solidFill>
           </a:ln>
-          <a:effectLst/>
           <a:effectLst>
             <a:outerShdw blurRad="90000" dist="38000" dir="5400000" rotWithShape="0">
               <a:srgbClr val="20242E">
@@ -5837,7 +5830,6 @@
               <a:srgbClr val="E4E3DE"/>
             </a:solidFill>
           </a:ln>
-          <a:effectLst/>
           <a:effectLst>
             <a:outerShdw blurRad="90000" dist="38000" dir="5400000" rotWithShape="0">
               <a:srgbClr val="20242E">
@@ -5981,7 +5973,6 @@
               <a:srgbClr val="D64550"/>
             </a:solidFill>
           </a:ln>
-          <a:effectLst/>
           <a:effectLst>
             <a:outerShdw blurRad="90000" dist="38000" dir="5400000" rotWithShape="0">
               <a:srgbClr val="20242E">
@@ -6618,7 +6609,6 @@
               <a:srgbClr val="D64550"/>
             </a:solidFill>
           </a:ln>
-          <a:effectLst/>
           <a:effectLst>
             <a:outerShdw blurRad="90000" dist="38000" dir="5400000" rotWithShape="0">
               <a:srgbClr val="20242E">
@@ -6878,7 +6868,6 @@
               <a:srgbClr val="D64550"/>
             </a:solidFill>
           </a:ln>
-          <a:effectLst/>
           <a:effectLst>
             <a:outerShdw blurRad="90000" dist="38000" dir="5400000" rotWithShape="0">
               <a:srgbClr val="20242E">
@@ -7657,7 +7646,6 @@
               <a:srgbClr val="E4E3DE"/>
             </a:solidFill>
           </a:ln>
-          <a:effectLst/>
           <a:effectLst>
             <a:outerShdw blurRad="90000" dist="38000" dir="5400000" rotWithShape="0">
               <a:srgbClr val="20242E">
@@ -7811,7 +7799,6 @@
               <a:srgbClr val="D64550"/>
             </a:solidFill>
           </a:ln>
-          <a:effectLst/>
           <a:effectLst>
             <a:outerShdw blurRad="90000" dist="38000" dir="5400000" rotWithShape="0">
               <a:srgbClr val="20242E">
@@ -7965,7 +7952,6 @@
               <a:srgbClr val="D64550"/>
             </a:solidFill>
           </a:ln>
-          <a:effectLst/>
           <a:effectLst>
             <a:outerShdw blurRad="90000" dist="38000" dir="5400000" rotWithShape="0">
               <a:srgbClr val="20242E">
@@ -8119,7 +8105,6 @@
               <a:srgbClr val="E4E3DE"/>
             </a:solidFill>
           </a:ln>
-          <a:effectLst/>
           <a:effectLst>
             <a:outerShdw blurRad="90000" dist="38000" dir="5400000" rotWithShape="0">
               <a:srgbClr val="20242E">
@@ -8273,7 +8258,6 @@
               <a:srgbClr val="E4E3DE"/>
             </a:solidFill>
           </a:ln>
-          <a:effectLst/>
           <a:effectLst>
             <a:outerShdw blurRad="90000" dist="38000" dir="5400000" rotWithShape="0">
               <a:srgbClr val="20242E">
@@ -8427,7 +8411,6 @@
               <a:srgbClr val="D64550"/>
             </a:solidFill>
           </a:ln>
-          <a:effectLst/>
           <a:effectLst>
             <a:outerShdw blurRad="90000" dist="38000" dir="5400000" rotWithShape="0">
               <a:srgbClr val="20242E">
@@ -8581,7 +8564,6 @@
               <a:srgbClr val="D64550"/>
             </a:solidFill>
           </a:ln>
-          <a:effectLst/>
           <a:effectLst>
             <a:outerShdw blurRad="90000" dist="38000" dir="5400000" rotWithShape="0">
               <a:srgbClr val="20242E">
@@ -8735,7 +8717,6 @@
               <a:srgbClr val="D64550"/>
             </a:solidFill>
           </a:ln>
-          <a:effectLst/>
           <a:effectLst>
             <a:outerShdw blurRad="90000" dist="38000" dir="5400000" rotWithShape="0">
               <a:srgbClr val="20242E">
@@ -9372,7 +9353,6 @@
               <a:srgbClr val="E4E3DE"/>
             </a:solidFill>
           </a:ln>
-          <a:effectLst/>
           <a:effectLst>
             <a:outerShdw blurRad="90000" dist="38000" dir="5400000" rotWithShape="0">
               <a:srgbClr val="20242E">
@@ -9626,7 +9606,6 @@
               <a:srgbClr val="D64550"/>
             </a:solidFill>
           </a:ln>
-          <a:effectLst/>
           <a:effectLst>
             <a:outerShdw blurRad="90000" dist="38000" dir="5400000" rotWithShape="0">
               <a:srgbClr val="20242E">
@@ -10494,7 +10473,6 @@
               <a:srgbClr val="E4E3DE"/>
             </a:solidFill>
           </a:ln>
-          <a:effectLst/>
           <a:effectLst>
             <a:outerShdw blurRad="90000" dist="38000" dir="5400000" rotWithShape="0">
               <a:srgbClr val="20242E">
@@ -10663,7 +10641,6 @@
               <a:srgbClr val="E4E3DE"/>
             </a:solidFill>
           </a:ln>
-          <a:effectLst/>
           <a:effectLst>
             <a:outerShdw blurRad="90000" dist="38000" dir="5400000" rotWithShape="0">
               <a:srgbClr val="20242E">
@@ -10832,7 +10809,6 @@
               <a:srgbClr val="E4E3DE"/>
             </a:solidFill>
           </a:ln>
-          <a:effectLst/>
           <a:effectLst>
             <a:outerShdw blurRad="90000" dist="38000" dir="5400000" rotWithShape="0">
               <a:srgbClr val="20242E">
@@ -11001,7 +10977,6 @@
               <a:srgbClr val="E4E3DE"/>
             </a:solidFill>
           </a:ln>
-          <a:effectLst/>
           <a:effectLst>
             <a:outerShdw blurRad="90000" dist="38000" dir="5400000" rotWithShape="0">
               <a:srgbClr val="20242E">
@@ -11170,7 +11145,6 @@
               <a:srgbClr val="E4E3DE"/>
             </a:solidFill>
           </a:ln>
-          <a:effectLst/>
           <a:effectLst>
             <a:outerShdw blurRad="90000" dist="38000" dir="5400000" rotWithShape="0">
               <a:srgbClr val="20242E">
@@ -11339,7 +11313,6 @@
               <a:srgbClr val="E4E3DE"/>
             </a:solidFill>
           </a:ln>
-          <a:effectLst/>
           <a:effectLst>
             <a:outerShdw blurRad="90000" dist="38000" dir="5400000" rotWithShape="0">
               <a:srgbClr val="20242E">
@@ -11508,7 +11481,6 @@
               <a:srgbClr val="E4E3DE"/>
             </a:solidFill>
           </a:ln>
-          <a:effectLst/>
           <a:effectLst>
             <a:outerShdw blurRad="90000" dist="38000" dir="5400000" rotWithShape="0">
               <a:srgbClr val="20242E">
@@ -11677,7 +11649,6 @@
               <a:srgbClr val="E4E3DE"/>
             </a:solidFill>
           </a:ln>
-          <a:effectLst/>
           <a:effectLst>
             <a:outerShdw blurRad="90000" dist="38000" dir="5400000" rotWithShape="0">
               <a:srgbClr val="20242E">
@@ -11846,7 +11817,6 @@
               <a:srgbClr val="E4E3DE"/>
             </a:solidFill>
           </a:ln>
-          <a:effectLst/>
           <a:effectLst>
             <a:outerShdw blurRad="90000" dist="38000" dir="5400000" rotWithShape="0">
               <a:srgbClr val="20242E">
@@ -12595,7 +12565,6 @@
               <a:srgbClr val="E4E3DE"/>
             </a:solidFill>
           </a:ln>
-          <a:effectLst/>
           <a:effectLst>
             <a:outerShdw blurRad="90000" dist="38000" dir="5400000" rotWithShape="0">
               <a:srgbClr val="20242E">
@@ -13450,7 +13419,6 @@
               <a:srgbClr val="D64550"/>
             </a:solidFill>
           </a:ln>
-          <a:effectLst/>
           <a:effectLst>
             <a:outerShdw blurRad="90000" dist="38000" dir="5400000" rotWithShape="0">
               <a:srgbClr val="20242E">
@@ -14199,7 +14167,6 @@
               <a:srgbClr val="E4E3DE"/>
             </a:solidFill>
           </a:ln>
-          <a:effectLst/>
           <a:effectLst>
             <a:outerShdw blurRad="90000" dist="38000" dir="5400000" rotWithShape="0">
               <a:srgbClr val="20242E">
@@ -14410,7 +14377,6 @@
               <a:srgbClr val="E4E3DE"/>
             </a:solidFill>
           </a:ln>
-          <a:effectLst/>
           <a:effectLst>
             <a:outerShdw blurRad="90000" dist="38000" dir="5400000" rotWithShape="0">
               <a:srgbClr val="20242E">
@@ -14621,7 +14587,6 @@
               <a:srgbClr val="D64550"/>
             </a:solidFill>
           </a:ln>
-          <a:effectLst/>
           <a:effectLst>
             <a:outerShdw blurRad="90000" dist="38000" dir="5400000" rotWithShape="0">
               <a:srgbClr val="20242E">
@@ -15456,7 +15421,6 @@
               <a:srgbClr val="E4E3DE"/>
             </a:solidFill>
           </a:ln>
-          <a:effectLst/>
           <a:effectLst>
             <a:outerShdw blurRad="90000" dist="38000" dir="5400000" rotWithShape="0">
               <a:srgbClr val="20242E">
@@ -15772,7 +15736,6 @@
               <a:srgbClr val="E4E3DE"/>
             </a:solidFill>
           </a:ln>
-          <a:effectLst/>
           <a:effectLst>
             <a:outerShdw blurRad="90000" dist="38000" dir="5400000" rotWithShape="0">
               <a:srgbClr val="20242E">
@@ -16142,7 +16105,6 @@
               <a:srgbClr val="E4E3DE"/>
             </a:solidFill>
           </a:ln>
-          <a:effectLst/>
           <a:effectLst>
             <a:outerShdw blurRad="90000" dist="38000" dir="5400000" rotWithShape="0">
               <a:srgbClr val="20242E">
@@ -17040,7 +17002,6 @@
               <a:srgbClr val="D64550"/>
             </a:solidFill>
           </a:ln>
-          <a:effectLst/>
           <a:effectLst>
             <a:outerShdw blurRad="90000" dist="38000" dir="5400000" rotWithShape="0">
               <a:srgbClr val="20242E">
@@ -17410,7 +17371,6 @@
               <a:srgbClr val="E4E3DE"/>
             </a:solidFill>
           </a:ln>
-          <a:effectLst/>
           <a:effectLst>
             <a:outerShdw blurRad="90000" dist="38000" dir="5400000" rotWithShape="0">
               <a:srgbClr val="20242E">
@@ -18862,7 +18822,6 @@
               <a:srgbClr val="E4E3DE"/>
             </a:solidFill>
           </a:ln>
-          <a:effectLst/>
           <a:effectLst>
             <a:outerShdw blurRad="90000" dist="38000" dir="5400000" rotWithShape="0">
               <a:srgbClr val="20242E">
@@ -19151,7 +19110,6 @@
               <a:srgbClr val="E4E3DE"/>
             </a:solidFill>
           </a:ln>
-          <a:effectLst/>
           <a:effectLst>
             <a:outerShdw blurRad="90000" dist="38000" dir="5400000" rotWithShape="0">
               <a:srgbClr val="20242E">
@@ -19467,7 +19425,6 @@
               <a:srgbClr val="D64550"/>
             </a:solidFill>
           </a:ln>
-          <a:effectLst/>
           <a:effectLst>
             <a:outerShdw blurRad="90000" dist="38000" dir="5400000" rotWithShape="0">
               <a:srgbClr val="20242E">
@@ -20580,7 +20537,6 @@
               <a:srgbClr val="E4E3DE"/>
             </a:solidFill>
           </a:ln>
-          <a:effectLst/>
           <a:effectLst>
             <a:outerShdw blurRad="90000" dist="38000" dir="5400000" rotWithShape="0">
               <a:srgbClr val="20242E">
@@ -20724,7 +20680,6 @@
               <a:srgbClr val="E4E3DE"/>
             </a:solidFill>
           </a:ln>
-          <a:effectLst/>
           <a:effectLst>
             <a:outerShdw blurRad="90000" dist="38000" dir="5400000" rotWithShape="0">
               <a:srgbClr val="20242E">
@@ -20868,7 +20823,6 @@
               <a:srgbClr val="E4E3DE"/>
             </a:solidFill>
           </a:ln>
-          <a:effectLst/>
           <a:effectLst>
             <a:outerShdw blurRad="90000" dist="38000" dir="5400000" rotWithShape="0">
               <a:srgbClr val="20242E">
@@ -21585,7 +21539,6 @@
               <a:srgbClr val="E4E3DE"/>
             </a:solidFill>
           </a:ln>
-          <a:effectLst/>
           <a:effectLst>
             <a:outerShdw blurRad="90000" dist="38000" dir="5400000" rotWithShape="0">
               <a:srgbClr val="20242E">
